--- a/Evidencias_grupales/Presentacion Proyecto.pptx
+++ b/Evidencias_grupales/Presentacion Proyecto.pptx
@@ -2181,7 +2181,7 @@
         </p:nvSpPr>
         <p:spPr>
           <a:xfrm>
-            <a:off x="640080" y="5943600"/>
+            <a:off x="609600" y="6291072"/>
             <a:ext cx="5486400" cy="274320"/>
           </a:xfrm>
           <a:prstGeom prst="rect">
@@ -2212,6 +2212,36 @@
           </a:p>
         </p:txBody>
       </p:sp>
+      <p:pic>
+        <p:nvPicPr>
+          <p:cNvPr id="19" name="Imagen 18">
+            <a:extLst>
+              <a:ext uri="{FF2B5EF4-FFF2-40B4-BE49-F238E27FC236}">
+                <a16:creationId xmlns:a16="http://schemas.microsoft.com/office/drawing/2014/main" id="{3ABA1B00-AA67-CC52-3D8E-EFAAB9299F50}"/>
+              </a:ext>
+            </a:extLst>
+          </p:cNvPr>
+          <p:cNvPicPr>
+            <a:picLocks noChangeAspect="1"/>
+          </p:cNvPicPr>
+          <p:nvPr/>
+        </p:nvPicPr>
+        <p:blipFill>
+          <a:blip r:embed="rId3"/>
+          <a:stretch>
+            <a:fillRect/>
+          </a:stretch>
+        </p:blipFill>
+        <p:spPr>
+          <a:xfrm>
+            <a:off x="609600" y="5481828"/>
+            <a:ext cx="3108960" cy="693964"/>
+          </a:xfrm>
+          <a:prstGeom prst="rect">
+            <a:avLst/>
+          </a:prstGeom>
+        </p:spPr>
+      </p:pic>
     </p:spTree>
   </p:cSld>
   <p:clrMapOvr>

--- a/Evidencias_grupales/Presentacion Proyecto.pptx
+++ b/Evidencias_grupales/Presentacion Proyecto.pptx
@@ -21,6 +21,7 @@
     <p:sldId id="266" r:id="rId15"/>
     <p:sldId id="267" r:id="rId16"/>
     <p:sldId id="268" r:id="rId17"/>
+    <p:sldId id="269" r:id="rId18"/>
   </p:sldIdLst>
   <p:sldSz cy="6858000" cx="12192000"/>
   <p:notesSz cx="6858000" cy="12192000"/>
@@ -255,7 +256,7 @@
   </p:defaultTextStyle>
   <p:extLst>
     <p:ext uri="GoogleSlidesCustomDataVersion2">
-      <go:slidesCustomData xmlns:go="http://customooxmlschemas.google.com/" r:id="rId18" roundtripDataSignature="AMtx7mga2DcdyWFUz43NtEx4zZ0Iuo7TrQ=="/>
+      <go:slidesCustomData xmlns:go="http://customooxmlschemas.google.com/" r:id="rId19" roundtripDataSignature="AMtx7mj9Td9/O/AWrvBd32BKXZAtEsh7lw=="/>
     </p:ext>
   </p:extLst>
 </p:presentation>
@@ -1315,7 +1316,7 @@
       </p:grpSpPr>
       <p:sp>
         <p:nvSpPr>
-          <p:cNvPr id="395" name="Google Shape;395;p12:notes"/>
+          <p:cNvPr id="395" name="Google Shape;395;g3f8ba86352e_0_8:notes"/>
           <p:cNvSpPr/>
           <p:nvPr>
             <p:ph idx="2" type="sldImg"/>
@@ -1354,7 +1355,7 @@
       </p:sp>
       <p:sp>
         <p:nvSpPr>
-          <p:cNvPr id="396" name="Google Shape;396;p12:notes"/>
+          <p:cNvPr id="396" name="Google Shape;396;g3f8ba86352e_0_8:notes"/>
           <p:cNvSpPr txBox="1"/>
           <p:nvPr>
             <p:ph idx="1" type="body"/>
@@ -1394,6 +1395,65 @@
                   <a:schemeClr val="dk1"/>
                 </a:solidFill>
               </a:rPr>
+              <a:t>Comencemos con nuestras </a:t>
+            </a:r>
+            <a:r>
+              <a:rPr b="1" lang="en-US" sz="1100">
+                <a:solidFill>
+                  <a:schemeClr val="dk1"/>
+                </a:solidFill>
+              </a:rPr>
+              <a:t>Fortalezas</a:t>
+            </a:r>
+            <a:r>
+              <a:rPr lang="en-US" sz="1100">
+                <a:solidFill>
+                  <a:schemeClr val="dk1"/>
+                </a:solidFill>
+              </a:rPr>
+              <a:t>. Actualmente, contamos con una base técnica muy sólida. Tenemos un dashboard y un backend multiempresa que ya están operativos. La arquitectura está respaldada por autenticación JWT, control de roles, PostgreSQL, Redis y un sistema de cola de trabajos. Además, ya tenemos integraciones clave funcionando, como la generación de dossiers para personas y empresas en UK y USA, junto con sincronización para calendarios de Google y Microsoft. Lo más importante de esta etapa es que nuestra arquitectura modular nos permite aplicar mejoras por frentes separados sin romper el sistema </a:t>
+            </a:r>
+            <a:endParaRPr sz="1100">
+              <a:solidFill>
+                <a:schemeClr val="dk1"/>
+              </a:solidFill>
+            </a:endParaRPr>
+          </a:p>
+          <a:p>
+            <a:pPr indent="0" lvl="0" marL="0" marR="0" rtl="0" algn="l">
+              <a:spcBef>
+                <a:spcPts val="0"/>
+              </a:spcBef>
+              <a:spcAft>
+                <a:spcPts val="0"/>
+              </a:spcAft>
+              <a:buNone/>
+            </a:pPr>
+            <a:r>
+              <a:t/>
+            </a:r>
+            <a:endParaRPr sz="1100">
+              <a:solidFill>
+                <a:schemeClr val="dk1"/>
+              </a:solidFill>
+            </a:endParaRPr>
+          </a:p>
+          <a:p>
+            <a:pPr indent="0" lvl="0" marL="0" marR="0" rtl="0" algn="l">
+              <a:spcBef>
+                <a:spcPts val="0"/>
+              </a:spcBef>
+              <a:spcAft>
+                <a:spcPts val="0"/>
+              </a:spcAft>
+              <a:buNone/>
+            </a:pPr>
+            <a:r>
+              <a:rPr lang="en-US" sz="1100">
+                <a:solidFill>
+                  <a:schemeClr val="dk1"/>
+                </a:solidFill>
+              </a:rPr>
               <a:t>Toda esta base nos abre </a:t>
             </a:r>
             <a:r>
@@ -1410,7 +1470,7 @@
                   <a:schemeClr val="dk1"/>
                 </a:solidFill>
               </a:rPr>
-              <a:t> muy claras. A nivel externo, nuestro MVP resuelve una necesidad laboral concreta aprovechando registros oficiales y servicios especializados. A nivel de desarrollo, contar con entornos de prueba como los de Stripe y tener despliegues configurables significa que podemos validar todo nuestro flujo de trabajo sin riesgo de hacer cobros reales y sin exponer datos sensibles de producción. </a:t>
+              <a:t> muy claras. A nivel externo, nuestro MVP resuelve una necesidad laboral concreta aprovechando registros oficiales y servicios especializados. A nivel de desarrollo, contar con entornos de prueba como los de Stripe y tener despliegues configurables significa que podemos validar todo nuestro flujo de trabajo sin riesgo de hacer cobros reales y sin exponer datos sensibles de producción </a:t>
             </a:r>
             <a:endParaRPr sz="1100">
               <a:solidFill>
@@ -1418,70 +1478,11 @@
               </a:solidFill>
             </a:endParaRPr>
           </a:p>
-          <a:p>
-            <a:pPr indent="0" lvl="0" marL="0" marR="0" rtl="0" algn="l">
-              <a:spcBef>
-                <a:spcPts val="0"/>
-              </a:spcBef>
-              <a:spcAft>
-                <a:spcPts val="0"/>
-              </a:spcAft>
-              <a:buNone/>
-            </a:pPr>
-            <a:r>
-              <a:t/>
-            </a:r>
-            <a:endParaRPr sz="1100">
-              <a:solidFill>
-                <a:schemeClr val="dk1"/>
-              </a:solidFill>
-            </a:endParaRPr>
-          </a:p>
-          <a:p>
-            <a:pPr indent="0" lvl="0" marL="0" marR="0" rtl="0" algn="l">
-              <a:spcBef>
-                <a:spcPts val="0"/>
-              </a:spcBef>
-              <a:spcAft>
-                <a:spcPts val="0"/>
-              </a:spcAft>
-              <a:buNone/>
-            </a:pPr>
-            <a:r>
-              <a:rPr lang="en-US" sz="1100">
-                <a:solidFill>
-                  <a:schemeClr val="dk1"/>
-                </a:solidFill>
-              </a:rPr>
-              <a:t>Por supuesto, también tenemos </a:t>
-            </a:r>
-            <a:r>
-              <a:rPr b="1" lang="en-US" sz="1100">
-                <a:solidFill>
-                  <a:schemeClr val="dk1"/>
-                </a:solidFill>
-              </a:rPr>
-              <a:t>Debilidades</a:t>
-            </a:r>
-            <a:r>
-              <a:rPr lang="en-US" sz="1100">
-                <a:solidFill>
-                  <a:schemeClr val="dk1"/>
-                </a:solidFill>
-              </a:rPr>
-              <a:t> internas que estamos priorizando. Actualmente, la documentación técnica no refleja al cien por ciento las decisiones más recientes, y nuestra salida de datos sigue estando en formato Markdown. Aún nos falta implementar modelos más estructurados, correos transaccionales, auditoría, el cierre de la integración de Stripe y un pipeline de Integración Continua con migraciones automatizadas. También quiero ser transparente: existen opciones en el frontend que hoy están simuladas y riesgos de seguridad pendientes que debemos cerrar antes de presentar esas funciones como terminadas </a:t>
-            </a:r>
-            <a:endParaRPr sz="1100">
-              <a:solidFill>
-                <a:schemeClr val="dk1"/>
-              </a:solidFill>
-            </a:endParaRPr>
-          </a:p>
-        </p:txBody>
-      </p:sp>
-      <p:sp>
-        <p:nvSpPr>
-          <p:cNvPr id="397" name="Google Shape;397;p12:notes"/>
+        </p:txBody>
+      </p:sp>
+      <p:sp>
+        <p:nvSpPr>
+          <p:cNvPr id="397" name="Google Shape;397;g3f8ba86352e_0_8:notes"/>
           <p:cNvSpPr txBox="1"/>
           <p:nvPr>
             <p:ph idx="12" type="sldNum"/>
@@ -1552,7 +1553,7 @@
   <p:cSld>
     <p:spTree>
       <p:nvGrpSpPr>
-        <p:cNvPr id="433" name="Shape 433"/>
+        <p:cNvPr id="400" name="Shape 400"/>
         <p:cNvGrpSpPr/>
         <p:nvPr/>
       </p:nvGrpSpPr>
@@ -1566,7 +1567,7 @@
       </p:grpSpPr>
       <p:sp>
         <p:nvSpPr>
-          <p:cNvPr id="434" name="Google Shape;434;p13:notes"/>
+          <p:cNvPr id="401" name="Google Shape;401;p12:notes"/>
           <p:cNvSpPr/>
           <p:nvPr>
             <p:ph idx="2" type="sldImg"/>
@@ -1605,7 +1606,7 @@
       </p:sp>
       <p:sp>
         <p:nvSpPr>
-          <p:cNvPr id="435" name="Google Shape;435;p13:notes"/>
+          <p:cNvPr id="402" name="Google Shape;402;p12:notes"/>
           <p:cNvSpPr txBox="1"/>
           <p:nvPr>
             <p:ph idx="1" type="body"/>
@@ -1640,9 +1641,145 @@
               <a:buNone/>
             </a:pPr>
             <a:r>
+              <a:rPr lang="en-US" sz="1100">
+                <a:solidFill>
+                  <a:schemeClr val="dk1"/>
+                </a:solidFill>
+              </a:rPr>
+              <a:t>Toda esta base nos abre </a:t>
+            </a:r>
+            <a:r>
+              <a:rPr b="1" lang="en-US" sz="1100">
+                <a:solidFill>
+                  <a:schemeClr val="dk1"/>
+                </a:solidFill>
+              </a:rPr>
+              <a:t>Oportunidades</a:t>
+            </a:r>
+            <a:r>
+              <a:rPr lang="en-US" sz="1100">
+                <a:solidFill>
+                  <a:schemeClr val="dk1"/>
+                </a:solidFill>
+              </a:rPr>
+              <a:t> muy claras. A nivel externo, nuestro MVP resuelve una necesidad laboral concreta aprovechando registros oficiales y servicios especializados. A nivel de desarrollo, contar con entornos de prueba como los de Stripe y tener despliegues configurables significa que podemos validar todo nuestro flujo de trabajo sin riesgo de hacer cobros reales y sin exponer datos sensibles de producción. </a:t>
+            </a:r>
+            <a:endParaRPr sz="1100">
+              <a:solidFill>
+                <a:schemeClr val="dk1"/>
+              </a:solidFill>
+            </a:endParaRPr>
+          </a:p>
+          <a:p>
+            <a:pPr indent="0" lvl="0" marL="0" marR="0" rtl="0" algn="l">
+              <a:spcBef>
+                <a:spcPts val="0"/>
+              </a:spcBef>
+              <a:spcAft>
+                <a:spcPts val="0"/>
+              </a:spcAft>
+              <a:buNone/>
+            </a:pPr>
+            <a:r>
               <a:t/>
             </a:r>
-            <a:endParaRPr sz="1200">
+            <a:endParaRPr sz="1100">
+              <a:solidFill>
+                <a:schemeClr val="dk1"/>
+              </a:solidFill>
+            </a:endParaRPr>
+          </a:p>
+          <a:p>
+            <a:pPr indent="0" lvl="0" marL="0" marR="0" rtl="0" algn="l">
+              <a:spcBef>
+                <a:spcPts val="0"/>
+              </a:spcBef>
+              <a:spcAft>
+                <a:spcPts val="0"/>
+              </a:spcAft>
+              <a:buNone/>
+            </a:pPr>
+            <a:r>
+              <a:rPr lang="en-US" sz="1100">
+                <a:solidFill>
+                  <a:schemeClr val="dk1"/>
+                </a:solidFill>
+              </a:rPr>
+              <a:t>Por supuesto, también tenemos </a:t>
+            </a:r>
+            <a:r>
+              <a:rPr b="1" lang="en-US" sz="1100">
+                <a:solidFill>
+                  <a:schemeClr val="dk1"/>
+                </a:solidFill>
+              </a:rPr>
+              <a:t>Debilidades</a:t>
+            </a:r>
+            <a:r>
+              <a:rPr lang="en-US" sz="1100">
+                <a:solidFill>
+                  <a:schemeClr val="dk1"/>
+                </a:solidFill>
+              </a:rPr>
+              <a:t> internas que estamos priorizando. Actualmente, la documentación técnica no refleja al cien por ciento las decisiones más recientes, y nuestra salida de datos sigue estando en formato Markdown. Aún nos falta implementar modelos más estructurados, correos transaccionales, auditoría, el cierre de la integración de Stripe y un pipeline de Integración Continua con migraciones automatizadas. También quiero ser transparente: existen opciones en el frontend que hoy están simuladas y riesgos de seguridad pendientes que debemos cerrar antes de presentar esas funciones como terminadas </a:t>
+            </a:r>
+            <a:endParaRPr sz="1100">
+              <a:solidFill>
+                <a:schemeClr val="dk1"/>
+              </a:solidFill>
+            </a:endParaRPr>
+          </a:p>
+        </p:txBody>
+      </p:sp>
+      <p:sp>
+        <p:nvSpPr>
+          <p:cNvPr id="403" name="Google Shape;403;p12:notes"/>
+          <p:cNvSpPr txBox="1"/>
+          <p:nvPr>
+            <p:ph idx="12" type="sldNum"/>
+          </p:nvPr>
+        </p:nvSpPr>
+        <p:spPr>
+          <a:xfrm>
+            <a:off x="0" y="0"/>
+            <a:ext cx="3000000" cy="3000000"/>
+          </a:xfrm>
+          <a:prstGeom prst="rect">
+            <a:avLst/>
+          </a:prstGeom>
+          <a:noFill/>
+          <a:ln>
+            <a:noFill/>
+          </a:ln>
+        </p:spPr>
+        <p:txBody>
+          <a:bodyPr anchorCtr="0" anchor="t" bIns="45700" lIns="91425" spcFirstLastPara="1" rIns="91425" wrap="square" tIns="45700">
+            <a:noAutofit/>
+          </a:bodyPr>
+          <a:lstStyle/>
+          <a:p>
+            <a:pPr indent="0" lvl="0" marL="0" marR="0" rtl="0" algn="l">
+              <a:spcBef>
+                <a:spcPts val="0"/>
+              </a:spcBef>
+              <a:spcAft>
+                <a:spcPts val="0"/>
+              </a:spcAft>
+              <a:buNone/>
+            </a:pPr>
+            <a:fld id="{00000000-1234-1234-1234-123412341234}" type="slidenum">
+              <a:rPr lang="en-US" sz="1800">
+                <a:solidFill>
+                  <a:schemeClr val="dk1"/>
+                </a:solidFill>
+                <a:latin typeface="Arial"/>
+                <a:ea typeface="Arial"/>
+                <a:cs typeface="Arial"/>
+                <a:sym typeface="Arial"/>
+              </a:rPr>
+              <a:t>‹#›</a:t>
+            </a:fld>
+            <a:endParaRPr sz="1800">
               <a:solidFill>
                 <a:schemeClr val="dk1"/>
               </a:solidFill>
@@ -1654,9 +1791,124 @@
           </a:p>
         </p:txBody>
       </p:sp>
-      <p:sp>
-        <p:nvSpPr>
-          <p:cNvPr id="436" name="Google Shape;436;p13:notes"/>
+    </p:spTree>
+  </p:cSld>
+  <p:clrMapOvr>
+    <a:masterClrMapping/>
+  </p:clrMapOvr>
+</p:notes>
+</file>
+
+<file path=ppt/notesSlides/notesSlide14.xml><?xml version="1.0" encoding="utf-8"?>
+<p:notes xmlns:a="http://schemas.openxmlformats.org/drawingml/2006/main" xmlns:r="http://schemas.openxmlformats.org/officeDocument/2006/relationships" xmlns:mc="http://schemas.openxmlformats.org/markup-compatibility/2006" xmlns:mv="urn:schemas-microsoft-com:mac:vml" xmlns:p="http://schemas.openxmlformats.org/presentationml/2006/main" xmlns:c="http://schemas.openxmlformats.org/drawingml/2006/chart" xmlns:dgm="http://schemas.openxmlformats.org/drawingml/2006/diagram" xmlns:o="urn:schemas-microsoft-com:office:office" xmlns:v="urn:schemas-microsoft-com:vml" xmlns:pvml="urn:schemas-microsoft-com:office:powerpoint" xmlns:com="http://schemas.openxmlformats.org/drawingml/2006/compatibility" xmlns:p14="http://schemas.microsoft.com/office/powerpoint/2010/main" xmlns:p15="http://schemas.microsoft.com/office/powerpoint/2012/main" xmlns:ahyp="http://schemas.microsoft.com/office/drawing/2018/hyperlinkcolor" showMasterPhAnim="0" showMasterSp="0">
+  <p:cSld>
+    <p:spTree>
+      <p:nvGrpSpPr>
+        <p:cNvPr id="439" name="Shape 439"/>
+        <p:cNvGrpSpPr/>
+        <p:nvPr/>
+      </p:nvGrpSpPr>
+      <p:grpSpPr>
+        <a:xfrm>
+          <a:off x="0" y="0"/>
+          <a:ext cx="0" cy="0"/>
+          <a:chOff x="0" y="0"/>
+          <a:chExt cx="0" cy="0"/>
+        </a:xfrm>
+      </p:grpSpPr>
+      <p:sp>
+        <p:nvSpPr>
+          <p:cNvPr id="440" name="Google Shape;440;p13:notes"/>
+          <p:cNvSpPr/>
+          <p:nvPr>
+            <p:ph idx="2" type="sldImg"/>
+          </p:nvPr>
+        </p:nvSpPr>
+        <p:spPr>
+          <a:xfrm>
+            <a:off x="0" y="0"/>
+            <a:ext cx="3000000" cy="3000000"/>
+          </a:xfrm>
+          <a:custGeom>
+            <a:rect b="b" l="l" r="r" t="t"/>
+            <a:pathLst>
+              <a:path extrusionOk="0" h="120000" w="120000">
+                <a:moveTo>
+                  <a:pt x="0" y="0"/>
+                </a:moveTo>
+                <a:lnTo>
+                  <a:pt x="120000" y="0"/>
+                </a:lnTo>
+                <a:lnTo>
+                  <a:pt x="120000" y="120000"/>
+                </a:lnTo>
+                <a:lnTo>
+                  <a:pt x="0" y="120000"/>
+                </a:lnTo>
+                <a:close/>
+              </a:path>
+            </a:pathLst>
+          </a:custGeom>
+          <a:noFill/>
+          <a:ln>
+            <a:noFill/>
+          </a:ln>
+        </p:spPr>
+      </p:sp>
+      <p:sp>
+        <p:nvSpPr>
+          <p:cNvPr id="441" name="Google Shape;441;p13:notes"/>
+          <p:cNvSpPr txBox="1"/>
+          <p:nvPr>
+            <p:ph idx="1" type="body"/>
+          </p:nvPr>
+        </p:nvSpPr>
+        <p:spPr>
+          <a:xfrm>
+            <a:off x="0" y="0"/>
+            <a:ext cx="3000000" cy="3000000"/>
+          </a:xfrm>
+          <a:prstGeom prst="rect">
+            <a:avLst/>
+          </a:prstGeom>
+          <a:noFill/>
+          <a:ln>
+            <a:noFill/>
+          </a:ln>
+        </p:spPr>
+        <p:txBody>
+          <a:bodyPr anchorCtr="0" anchor="t" bIns="45700" lIns="91425" spcFirstLastPara="1" rIns="91425" wrap="square" tIns="45700">
+            <a:noAutofit/>
+          </a:bodyPr>
+          <a:lstStyle/>
+          <a:p>
+            <a:pPr indent="0" lvl="0" marL="0" marR="0" rtl="0" algn="l">
+              <a:spcBef>
+                <a:spcPts val="0"/>
+              </a:spcBef>
+              <a:spcAft>
+                <a:spcPts val="0"/>
+              </a:spcAft>
+              <a:buNone/>
+            </a:pPr>
+            <a:r>
+              <a:t/>
+            </a:r>
+            <a:endParaRPr sz="1200">
+              <a:solidFill>
+                <a:schemeClr val="dk1"/>
+              </a:solidFill>
+              <a:latin typeface="Arial"/>
+              <a:ea typeface="Arial"/>
+              <a:cs typeface="Arial"/>
+              <a:sym typeface="Arial"/>
+            </a:endParaRPr>
+          </a:p>
+        </p:txBody>
+      </p:sp>
+      <p:sp>
+        <p:nvSpPr>
+          <p:cNvPr id="442" name="Google Shape;442;p13:notes"/>
           <p:cNvSpPr txBox="1"/>
           <p:nvPr>
             <p:ph idx="12" type="sldNum"/>
@@ -8771,16 +9023,24 @@
           <a:chExt cx="0" cy="0"/>
         </a:xfrm>
       </p:grpSpPr>
-      <p:sp>
-        <p:nvSpPr>
-          <p:cNvPr id="399" name="Google Shape;399;p12"/>
-          <p:cNvSpPr txBox="1"/>
-          <p:nvPr/>
-        </p:nvSpPr>
-        <p:spPr>
-          <a:xfrm>
-            <a:off x="640080" y="384048"/>
-            <a:ext cx="10058400" cy="237744"/>
+      <p:pic>
+        <p:nvPicPr>
+          <p:cNvPr id="399" name="Google Shape;399;g3f8ba86352e_0_8"/>
+          <p:cNvPicPr preferRelativeResize="0"/>
+          <p:nvPr/>
+        </p:nvPicPr>
+        <p:blipFill>
+          <a:blip r:embed="rId3">
+            <a:alphaModFix/>
+          </a:blip>
+          <a:stretch>
+            <a:fillRect/>
+          </a:stretch>
+        </p:blipFill>
+        <p:spPr>
+          <a:xfrm>
+            <a:off x="152400" y="152400"/>
+            <a:ext cx="11319160" cy="6553198"/>
           </a:xfrm>
           <a:prstGeom prst="rect">
             <a:avLst/>
@@ -8790,2086 +9050,7 @@
             <a:noFill/>
           </a:ln>
         </p:spPr>
-        <p:txBody>
-          <a:bodyPr anchorCtr="0" anchor="ctr" bIns="0" lIns="0" spcFirstLastPara="1" rIns="0" wrap="square" tIns="0">
-            <a:noAutofit/>
-          </a:bodyPr>
-          <a:lstStyle/>
-          <a:p>
-            <a:pPr indent="0" lvl="0" marL="0" marR="0" rtl="0" algn="l">
-              <a:spcBef>
-                <a:spcPts val="0"/>
-              </a:spcBef>
-              <a:spcAft>
-                <a:spcPts val="0"/>
-              </a:spcAft>
-              <a:buClr>
-                <a:srgbClr val="B7791F"/>
-              </a:buClr>
-              <a:buSzPts val="1100"/>
-              <a:buFont typeface="Calibri"/>
-              <a:buNone/>
-            </a:pPr>
-            <a:r>
-              <a:rPr b="1" lang="en-US" sz="1100">
-                <a:solidFill>
-                  <a:srgbClr val="B7791F"/>
-                </a:solidFill>
-                <a:latin typeface="Calibri"/>
-                <a:ea typeface="Calibri"/>
-                <a:cs typeface="Calibri"/>
-                <a:sym typeface="Calibri"/>
-              </a:rPr>
-              <a:t>EQUIPO Y EVIDENCIAS</a:t>
-            </a:r>
-            <a:endParaRPr sz="1100">
-              <a:solidFill>
-                <a:schemeClr val="dk1"/>
-              </a:solidFill>
-              <a:latin typeface="Calibri"/>
-              <a:ea typeface="Calibri"/>
-              <a:cs typeface="Calibri"/>
-              <a:sym typeface="Calibri"/>
-            </a:endParaRPr>
-          </a:p>
-        </p:txBody>
-      </p:sp>
-      <p:sp>
-        <p:nvSpPr>
-          <p:cNvPr id="400" name="Google Shape;400;p12"/>
-          <p:cNvSpPr txBox="1"/>
-          <p:nvPr/>
-        </p:nvSpPr>
-        <p:spPr>
-          <a:xfrm>
-            <a:off x="640080" y="658368"/>
-            <a:ext cx="10881360" cy="566928"/>
-          </a:xfrm>
-          <a:prstGeom prst="rect">
-            <a:avLst/>
-          </a:prstGeom>
-          <a:noFill/>
-          <a:ln>
-            <a:noFill/>
-          </a:ln>
-        </p:spPr>
-        <p:txBody>
-          <a:bodyPr anchorCtr="0" anchor="ctr" bIns="0" lIns="0" spcFirstLastPara="1" rIns="0" wrap="square" tIns="0">
-            <a:noAutofit/>
-          </a:bodyPr>
-          <a:lstStyle/>
-          <a:p>
-            <a:pPr indent="0" lvl="0" marL="0" marR="0" rtl="0" algn="l">
-              <a:spcBef>
-                <a:spcPts val="0"/>
-              </a:spcBef>
-              <a:spcAft>
-                <a:spcPts val="0"/>
-              </a:spcAft>
-              <a:buClr>
-                <a:srgbClr val="1E2761"/>
-              </a:buClr>
-              <a:buSzPts val="3200"/>
-              <a:buFont typeface="Cambria"/>
-              <a:buNone/>
-            </a:pPr>
-            <a:r>
-              <a:rPr b="1" lang="en-US" sz="3200">
-                <a:solidFill>
-                  <a:srgbClr val="1E2761"/>
-                </a:solidFill>
-                <a:latin typeface="Cambria"/>
-                <a:ea typeface="Cambria"/>
-                <a:cs typeface="Cambria"/>
-                <a:sym typeface="Cambria"/>
-              </a:rPr>
-              <a:t>Quién responde por qué, y qué se entrega</a:t>
-            </a:r>
-            <a:endParaRPr sz="3200">
-              <a:solidFill>
-                <a:schemeClr val="dk1"/>
-              </a:solidFill>
-              <a:latin typeface="Calibri"/>
-              <a:ea typeface="Calibri"/>
-              <a:cs typeface="Calibri"/>
-              <a:sym typeface="Calibri"/>
-            </a:endParaRPr>
-          </a:p>
-        </p:txBody>
-      </p:sp>
-      <p:sp>
-        <p:nvSpPr>
-          <p:cNvPr id="401" name="Google Shape;401;p12"/>
-          <p:cNvSpPr/>
-          <p:nvPr/>
-        </p:nvSpPr>
-        <p:spPr>
-          <a:xfrm>
-            <a:off x="640080" y="1481328"/>
-            <a:ext cx="3383280" cy="1691640"/>
-          </a:xfrm>
-          <a:prstGeom prst="roundRect">
-            <a:avLst>
-              <a:gd fmla="val 3243" name="adj"/>
-            </a:avLst>
-          </a:prstGeom>
-          <a:solidFill>
-            <a:srgbClr val="FFFFFF"/>
-          </a:solidFill>
-          <a:ln cap="flat" cmpd="sng" w="9525">
-            <a:solidFill>
-              <a:srgbClr val="D8DEE9"/>
-            </a:solidFill>
-            <a:prstDash val="solid"/>
-            <a:round/>
-            <a:headEnd len="sm" w="sm" type="none"/>
-            <a:tailEnd len="sm" w="sm" type="none"/>
-          </a:ln>
-        </p:spPr>
-        <p:txBody>
-          <a:bodyPr anchorCtr="0" anchor="t" bIns="45700" lIns="91425" spcFirstLastPara="1" rIns="91425" wrap="square" tIns="45700">
-            <a:noAutofit/>
-          </a:bodyPr>
-          <a:lstStyle/>
-          <a:p>
-            <a:pPr indent="0" lvl="0" marL="0" marR="0" rtl="0" algn="l">
-              <a:spcBef>
-                <a:spcPts val="0"/>
-              </a:spcBef>
-              <a:spcAft>
-                <a:spcPts val="0"/>
-              </a:spcAft>
-              <a:buNone/>
-            </a:pPr>
-            <a:r>
-              <a:t/>
-            </a:r>
-            <a:endParaRPr sz="1800">
-              <a:solidFill>
-                <a:schemeClr val="dk1"/>
-              </a:solidFill>
-              <a:latin typeface="Calibri"/>
-              <a:ea typeface="Calibri"/>
-              <a:cs typeface="Calibri"/>
-              <a:sym typeface="Calibri"/>
-            </a:endParaRPr>
-          </a:p>
-        </p:txBody>
-      </p:sp>
-      <p:sp>
-        <p:nvSpPr>
-          <p:cNvPr id="402" name="Google Shape;402;p12"/>
-          <p:cNvSpPr/>
-          <p:nvPr/>
-        </p:nvSpPr>
-        <p:spPr>
-          <a:xfrm>
-            <a:off x="877824" y="1691640"/>
-            <a:ext cx="420624" cy="420624"/>
-          </a:xfrm>
-          <a:prstGeom prst="ellipse">
-            <a:avLst/>
-          </a:prstGeom>
-          <a:solidFill>
-            <a:srgbClr val="2F5FA8"/>
-          </a:solidFill>
-          <a:ln cap="flat" cmpd="sng" w="12700">
-            <a:solidFill>
-              <a:srgbClr val="2F5FA8"/>
-            </a:solidFill>
-            <a:prstDash val="solid"/>
-            <a:round/>
-            <a:headEnd len="sm" w="sm" type="none"/>
-            <a:tailEnd len="sm" w="sm" type="none"/>
-          </a:ln>
-        </p:spPr>
-        <p:txBody>
-          <a:bodyPr anchorCtr="0" anchor="t" bIns="45700" lIns="91425" spcFirstLastPara="1" rIns="91425" wrap="square" tIns="45700">
-            <a:noAutofit/>
-          </a:bodyPr>
-          <a:lstStyle/>
-          <a:p>
-            <a:pPr indent="0" lvl="0" marL="0" marR="0" rtl="0" algn="l">
-              <a:spcBef>
-                <a:spcPts val="0"/>
-              </a:spcBef>
-              <a:spcAft>
-                <a:spcPts val="0"/>
-              </a:spcAft>
-              <a:buNone/>
-            </a:pPr>
-            <a:r>
-              <a:t/>
-            </a:r>
-            <a:endParaRPr sz="1800">
-              <a:solidFill>
-                <a:schemeClr val="dk1"/>
-              </a:solidFill>
-              <a:latin typeface="Calibri"/>
-              <a:ea typeface="Calibri"/>
-              <a:cs typeface="Calibri"/>
-              <a:sym typeface="Calibri"/>
-            </a:endParaRPr>
-          </a:p>
-        </p:txBody>
-      </p:sp>
-      <p:sp>
-        <p:nvSpPr>
-          <p:cNvPr id="403" name="Google Shape;403;p12"/>
-          <p:cNvSpPr txBox="1"/>
-          <p:nvPr/>
-        </p:nvSpPr>
-        <p:spPr>
-          <a:xfrm>
-            <a:off x="877824" y="1691640"/>
-            <a:ext cx="420624" cy="420624"/>
-          </a:xfrm>
-          <a:prstGeom prst="rect">
-            <a:avLst/>
-          </a:prstGeom>
-          <a:noFill/>
-          <a:ln>
-            <a:noFill/>
-          </a:ln>
-        </p:spPr>
-        <p:txBody>
-          <a:bodyPr anchorCtr="0" anchor="ctr" bIns="0" lIns="0" spcFirstLastPara="1" rIns="0" wrap="square" tIns="0">
-            <a:noAutofit/>
-          </a:bodyPr>
-          <a:lstStyle/>
-          <a:p>
-            <a:pPr indent="0" lvl="0" marL="0" marR="0" rtl="0" algn="ctr">
-              <a:spcBef>
-                <a:spcPts val="0"/>
-              </a:spcBef>
-              <a:spcAft>
-                <a:spcPts val="0"/>
-              </a:spcAft>
-              <a:buClr>
-                <a:srgbClr val="FFFFFF"/>
-              </a:buClr>
-              <a:buSzPts val="1200"/>
-              <a:buFont typeface="Calibri"/>
-              <a:buNone/>
-            </a:pPr>
-            <a:r>
-              <a:rPr b="1" lang="en-US" sz="1200">
-                <a:solidFill>
-                  <a:srgbClr val="FFFFFF"/>
-                </a:solidFill>
-                <a:latin typeface="Calibri"/>
-                <a:ea typeface="Calibri"/>
-                <a:cs typeface="Calibri"/>
-                <a:sym typeface="Calibri"/>
-              </a:rPr>
-              <a:t>FO</a:t>
-            </a:r>
-            <a:endParaRPr sz="1200">
-              <a:solidFill>
-                <a:schemeClr val="dk1"/>
-              </a:solidFill>
-              <a:latin typeface="Calibri"/>
-              <a:ea typeface="Calibri"/>
-              <a:cs typeface="Calibri"/>
-              <a:sym typeface="Calibri"/>
-            </a:endParaRPr>
-          </a:p>
-        </p:txBody>
-      </p:sp>
-      <p:sp>
-        <p:nvSpPr>
-          <p:cNvPr id="404" name="Google Shape;404;p12"/>
-          <p:cNvSpPr txBox="1"/>
-          <p:nvPr/>
-        </p:nvSpPr>
-        <p:spPr>
-          <a:xfrm>
-            <a:off x="1408176" y="1700784"/>
-            <a:ext cx="2468880" cy="256032"/>
-          </a:xfrm>
-          <a:prstGeom prst="rect">
-            <a:avLst/>
-          </a:prstGeom>
-          <a:noFill/>
-          <a:ln>
-            <a:noFill/>
-          </a:ln>
-        </p:spPr>
-        <p:txBody>
-          <a:bodyPr anchorCtr="0" anchor="ctr" bIns="0" lIns="0" spcFirstLastPara="1" rIns="0" wrap="square" tIns="0">
-            <a:noAutofit/>
-          </a:bodyPr>
-          <a:lstStyle/>
-          <a:p>
-            <a:pPr indent="0" lvl="0" marL="0" marR="0" rtl="0" algn="l">
-              <a:spcBef>
-                <a:spcPts val="0"/>
-              </a:spcBef>
-              <a:spcAft>
-                <a:spcPts val="0"/>
-              </a:spcAft>
-              <a:buClr>
-                <a:srgbClr val="1E2761"/>
-              </a:buClr>
-              <a:buSzPts val="1350"/>
-              <a:buFont typeface="Cambria"/>
-              <a:buNone/>
-            </a:pPr>
-            <a:r>
-              <a:rPr b="1" lang="en-US" sz="1350">
-                <a:solidFill>
-                  <a:srgbClr val="1E2761"/>
-                </a:solidFill>
-                <a:latin typeface="Cambria"/>
-                <a:ea typeface="Cambria"/>
-                <a:cs typeface="Cambria"/>
-                <a:sym typeface="Cambria"/>
-              </a:rPr>
-              <a:t>Felipe Orellana</a:t>
-            </a:r>
-            <a:endParaRPr sz="1350">
-              <a:solidFill>
-                <a:schemeClr val="dk1"/>
-              </a:solidFill>
-              <a:latin typeface="Calibri"/>
-              <a:ea typeface="Calibri"/>
-              <a:cs typeface="Calibri"/>
-              <a:sym typeface="Calibri"/>
-            </a:endParaRPr>
-          </a:p>
-        </p:txBody>
-      </p:sp>
-      <p:sp>
-        <p:nvSpPr>
-          <p:cNvPr id="405" name="Google Shape;405;p12"/>
-          <p:cNvSpPr txBox="1"/>
-          <p:nvPr/>
-        </p:nvSpPr>
-        <p:spPr>
-          <a:xfrm>
-            <a:off x="1408176" y="1938528"/>
-            <a:ext cx="2468880" cy="237744"/>
-          </a:xfrm>
-          <a:prstGeom prst="rect">
-            <a:avLst/>
-          </a:prstGeom>
-          <a:noFill/>
-          <a:ln>
-            <a:noFill/>
-          </a:ln>
-        </p:spPr>
-        <p:txBody>
-          <a:bodyPr anchorCtr="0" anchor="ctr" bIns="0" lIns="0" spcFirstLastPara="1" rIns="0" wrap="square" tIns="0">
-            <a:noAutofit/>
-          </a:bodyPr>
-          <a:lstStyle/>
-          <a:p>
-            <a:pPr indent="0" lvl="0" marL="0" marR="0" rtl="0" algn="l">
-              <a:spcBef>
-                <a:spcPts val="0"/>
-              </a:spcBef>
-              <a:spcAft>
-                <a:spcPts val="0"/>
-              </a:spcAft>
-              <a:buClr>
-                <a:srgbClr val="2F5FA8"/>
-              </a:buClr>
-              <a:buSzPts val="1100"/>
-              <a:buFont typeface="Calibri"/>
-              <a:buNone/>
-            </a:pPr>
-            <a:r>
-              <a:rPr b="1" lang="en-US" sz="1100">
-                <a:solidFill>
-                  <a:srgbClr val="2F5FA8"/>
-                </a:solidFill>
-                <a:latin typeface="Calibri"/>
-                <a:ea typeface="Calibri"/>
-                <a:cs typeface="Calibri"/>
-                <a:sym typeface="Calibri"/>
-              </a:rPr>
-              <a:t>Backend y agentes</a:t>
-            </a:r>
-            <a:endParaRPr sz="1100">
-              <a:solidFill>
-                <a:schemeClr val="dk1"/>
-              </a:solidFill>
-              <a:latin typeface="Calibri"/>
-              <a:ea typeface="Calibri"/>
-              <a:cs typeface="Calibri"/>
-              <a:sym typeface="Calibri"/>
-            </a:endParaRPr>
-          </a:p>
-        </p:txBody>
-      </p:sp>
-      <p:sp>
-        <p:nvSpPr>
-          <p:cNvPr id="406" name="Google Shape;406;p12"/>
-          <p:cNvSpPr txBox="1"/>
-          <p:nvPr/>
-        </p:nvSpPr>
-        <p:spPr>
-          <a:xfrm>
-            <a:off x="877824" y="2331720"/>
-            <a:ext cx="2926080" cy="777240"/>
-          </a:xfrm>
-          <a:prstGeom prst="rect">
-            <a:avLst/>
-          </a:prstGeom>
-          <a:noFill/>
-          <a:ln>
-            <a:noFill/>
-          </a:ln>
-        </p:spPr>
-        <p:txBody>
-          <a:bodyPr anchorCtr="0" anchor="ctr" bIns="0" lIns="0" spcFirstLastPara="1" rIns="0" wrap="square" tIns="0">
-            <a:noAutofit/>
-          </a:bodyPr>
-          <a:lstStyle/>
-          <a:p>
-            <a:pPr indent="0" lvl="0" marL="0" marR="0" rtl="0" algn="l">
-              <a:spcBef>
-                <a:spcPts val="0"/>
-              </a:spcBef>
-              <a:spcAft>
-                <a:spcPts val="0"/>
-              </a:spcAft>
-              <a:buClr>
-                <a:srgbClr val="5C6675"/>
-              </a:buClr>
-              <a:buSzPts val="1100"/>
-              <a:buFont typeface="Calibri"/>
-              <a:buNone/>
-            </a:pPr>
-            <a:r>
-              <a:rPr lang="en-US" sz="1100">
-                <a:solidFill>
-                  <a:srgbClr val="5C6675"/>
-                </a:solidFill>
-                <a:latin typeface="Calibri"/>
-                <a:ea typeface="Calibri"/>
-                <a:cs typeface="Calibri"/>
-                <a:sym typeface="Calibri"/>
-              </a:rPr>
-              <a:t>Diseño de la solución, búsqueda en registros europeos y prensa, redacción del informe y avance en tiempo real.</a:t>
-            </a:r>
-            <a:endParaRPr sz="1100">
-              <a:solidFill>
-                <a:schemeClr val="dk1"/>
-              </a:solidFill>
-              <a:latin typeface="Calibri"/>
-              <a:ea typeface="Calibri"/>
-              <a:cs typeface="Calibri"/>
-              <a:sym typeface="Calibri"/>
-            </a:endParaRPr>
-          </a:p>
-        </p:txBody>
-      </p:sp>
-      <p:sp>
-        <p:nvSpPr>
-          <p:cNvPr id="407" name="Google Shape;407;p12"/>
-          <p:cNvSpPr/>
-          <p:nvPr/>
-        </p:nvSpPr>
-        <p:spPr>
-          <a:xfrm>
-            <a:off x="4297680" y="1481328"/>
-            <a:ext cx="3383280" cy="1691640"/>
-          </a:xfrm>
-          <a:prstGeom prst="roundRect">
-            <a:avLst>
-              <a:gd fmla="val 3243" name="adj"/>
-            </a:avLst>
-          </a:prstGeom>
-          <a:solidFill>
-            <a:srgbClr val="FFFFFF"/>
-          </a:solidFill>
-          <a:ln cap="flat" cmpd="sng" w="9525">
-            <a:solidFill>
-              <a:srgbClr val="D8DEE9"/>
-            </a:solidFill>
-            <a:prstDash val="solid"/>
-            <a:round/>
-            <a:headEnd len="sm" w="sm" type="none"/>
-            <a:tailEnd len="sm" w="sm" type="none"/>
-          </a:ln>
-        </p:spPr>
-        <p:txBody>
-          <a:bodyPr anchorCtr="0" anchor="t" bIns="45700" lIns="91425" spcFirstLastPara="1" rIns="91425" wrap="square" tIns="45700">
-            <a:noAutofit/>
-          </a:bodyPr>
-          <a:lstStyle/>
-          <a:p>
-            <a:pPr indent="0" lvl="0" marL="0" marR="0" rtl="0" algn="l">
-              <a:spcBef>
-                <a:spcPts val="0"/>
-              </a:spcBef>
-              <a:spcAft>
-                <a:spcPts val="0"/>
-              </a:spcAft>
-              <a:buNone/>
-            </a:pPr>
-            <a:r>
-              <a:t/>
-            </a:r>
-            <a:endParaRPr sz="1800">
-              <a:solidFill>
-                <a:schemeClr val="dk1"/>
-              </a:solidFill>
-              <a:latin typeface="Calibri"/>
-              <a:ea typeface="Calibri"/>
-              <a:cs typeface="Calibri"/>
-              <a:sym typeface="Calibri"/>
-            </a:endParaRPr>
-          </a:p>
-        </p:txBody>
-      </p:sp>
-      <p:sp>
-        <p:nvSpPr>
-          <p:cNvPr id="408" name="Google Shape;408;p12"/>
-          <p:cNvSpPr/>
-          <p:nvPr/>
-        </p:nvSpPr>
-        <p:spPr>
-          <a:xfrm>
-            <a:off x="4535424" y="1691640"/>
-            <a:ext cx="420624" cy="420624"/>
-          </a:xfrm>
-          <a:prstGeom prst="ellipse">
-            <a:avLst/>
-          </a:prstGeom>
-          <a:solidFill>
-            <a:srgbClr val="1D7A6E"/>
-          </a:solidFill>
-          <a:ln cap="flat" cmpd="sng" w="12700">
-            <a:solidFill>
-              <a:srgbClr val="1D7A6E"/>
-            </a:solidFill>
-            <a:prstDash val="solid"/>
-            <a:round/>
-            <a:headEnd len="sm" w="sm" type="none"/>
-            <a:tailEnd len="sm" w="sm" type="none"/>
-          </a:ln>
-        </p:spPr>
-        <p:txBody>
-          <a:bodyPr anchorCtr="0" anchor="t" bIns="45700" lIns="91425" spcFirstLastPara="1" rIns="91425" wrap="square" tIns="45700">
-            <a:noAutofit/>
-          </a:bodyPr>
-          <a:lstStyle/>
-          <a:p>
-            <a:pPr indent="0" lvl="0" marL="0" marR="0" rtl="0" algn="l">
-              <a:spcBef>
-                <a:spcPts val="0"/>
-              </a:spcBef>
-              <a:spcAft>
-                <a:spcPts val="0"/>
-              </a:spcAft>
-              <a:buNone/>
-            </a:pPr>
-            <a:r>
-              <a:t/>
-            </a:r>
-            <a:endParaRPr sz="1800">
-              <a:solidFill>
-                <a:schemeClr val="dk1"/>
-              </a:solidFill>
-              <a:latin typeface="Calibri"/>
-              <a:ea typeface="Calibri"/>
-              <a:cs typeface="Calibri"/>
-              <a:sym typeface="Calibri"/>
-            </a:endParaRPr>
-          </a:p>
-        </p:txBody>
-      </p:sp>
-      <p:sp>
-        <p:nvSpPr>
-          <p:cNvPr id="409" name="Google Shape;409;p12"/>
-          <p:cNvSpPr txBox="1"/>
-          <p:nvPr/>
-        </p:nvSpPr>
-        <p:spPr>
-          <a:xfrm>
-            <a:off x="4535424" y="1691640"/>
-            <a:ext cx="420624" cy="420624"/>
-          </a:xfrm>
-          <a:prstGeom prst="rect">
-            <a:avLst/>
-          </a:prstGeom>
-          <a:noFill/>
-          <a:ln>
-            <a:noFill/>
-          </a:ln>
-        </p:spPr>
-        <p:txBody>
-          <a:bodyPr anchorCtr="0" anchor="ctr" bIns="0" lIns="0" spcFirstLastPara="1" rIns="0" wrap="square" tIns="0">
-            <a:noAutofit/>
-          </a:bodyPr>
-          <a:lstStyle/>
-          <a:p>
-            <a:pPr indent="0" lvl="0" marL="0" marR="0" rtl="0" algn="ctr">
-              <a:spcBef>
-                <a:spcPts val="0"/>
-              </a:spcBef>
-              <a:spcAft>
-                <a:spcPts val="0"/>
-              </a:spcAft>
-              <a:buClr>
-                <a:srgbClr val="FFFFFF"/>
-              </a:buClr>
-              <a:buSzPts val="1200"/>
-              <a:buFont typeface="Calibri"/>
-              <a:buNone/>
-            </a:pPr>
-            <a:r>
-              <a:rPr b="1" lang="en-US" sz="1200">
-                <a:solidFill>
-                  <a:srgbClr val="FFFFFF"/>
-                </a:solidFill>
-                <a:latin typeface="Calibri"/>
-                <a:ea typeface="Calibri"/>
-                <a:cs typeface="Calibri"/>
-                <a:sym typeface="Calibri"/>
-              </a:rPr>
-              <a:t>DG</a:t>
-            </a:r>
-            <a:endParaRPr sz="1200">
-              <a:solidFill>
-                <a:schemeClr val="dk1"/>
-              </a:solidFill>
-              <a:latin typeface="Calibri"/>
-              <a:ea typeface="Calibri"/>
-              <a:cs typeface="Calibri"/>
-              <a:sym typeface="Calibri"/>
-            </a:endParaRPr>
-          </a:p>
-        </p:txBody>
-      </p:sp>
-      <p:sp>
-        <p:nvSpPr>
-          <p:cNvPr id="410" name="Google Shape;410;p12"/>
-          <p:cNvSpPr txBox="1"/>
-          <p:nvPr/>
-        </p:nvSpPr>
-        <p:spPr>
-          <a:xfrm>
-            <a:off x="5065776" y="1700784"/>
-            <a:ext cx="2468880" cy="256032"/>
-          </a:xfrm>
-          <a:prstGeom prst="rect">
-            <a:avLst/>
-          </a:prstGeom>
-          <a:noFill/>
-          <a:ln>
-            <a:noFill/>
-          </a:ln>
-        </p:spPr>
-        <p:txBody>
-          <a:bodyPr anchorCtr="0" anchor="ctr" bIns="0" lIns="0" spcFirstLastPara="1" rIns="0" wrap="square" tIns="0">
-            <a:noAutofit/>
-          </a:bodyPr>
-          <a:lstStyle/>
-          <a:p>
-            <a:pPr indent="0" lvl="0" marL="0" marR="0" rtl="0" algn="l">
-              <a:spcBef>
-                <a:spcPts val="0"/>
-              </a:spcBef>
-              <a:spcAft>
-                <a:spcPts val="0"/>
-              </a:spcAft>
-              <a:buClr>
-                <a:srgbClr val="1E2761"/>
-              </a:buClr>
-              <a:buSzPts val="1350"/>
-              <a:buFont typeface="Cambria"/>
-              <a:buNone/>
-            </a:pPr>
-            <a:r>
-              <a:rPr b="1" lang="en-US" sz="1350">
-                <a:solidFill>
-                  <a:srgbClr val="1E2761"/>
-                </a:solidFill>
-                <a:latin typeface="Cambria"/>
-                <a:ea typeface="Cambria"/>
-                <a:cs typeface="Cambria"/>
-                <a:sym typeface="Cambria"/>
-              </a:rPr>
-              <a:t>Darío García</a:t>
-            </a:r>
-            <a:endParaRPr sz="1350">
-              <a:solidFill>
-                <a:schemeClr val="dk1"/>
-              </a:solidFill>
-              <a:latin typeface="Calibri"/>
-              <a:ea typeface="Calibri"/>
-              <a:cs typeface="Calibri"/>
-              <a:sym typeface="Calibri"/>
-            </a:endParaRPr>
-          </a:p>
-        </p:txBody>
-      </p:sp>
-      <p:sp>
-        <p:nvSpPr>
-          <p:cNvPr id="411" name="Google Shape;411;p12"/>
-          <p:cNvSpPr txBox="1"/>
-          <p:nvPr/>
-        </p:nvSpPr>
-        <p:spPr>
-          <a:xfrm>
-            <a:off x="5065776" y="1938528"/>
-            <a:ext cx="2468880" cy="237744"/>
-          </a:xfrm>
-          <a:prstGeom prst="rect">
-            <a:avLst/>
-          </a:prstGeom>
-          <a:noFill/>
-          <a:ln>
-            <a:noFill/>
-          </a:ln>
-        </p:spPr>
-        <p:txBody>
-          <a:bodyPr anchorCtr="0" anchor="ctr" bIns="0" lIns="0" spcFirstLastPara="1" rIns="0" wrap="square" tIns="0">
-            <a:noAutofit/>
-          </a:bodyPr>
-          <a:lstStyle/>
-          <a:p>
-            <a:pPr indent="0" lvl="0" marL="0" marR="0" rtl="0" algn="l">
-              <a:spcBef>
-                <a:spcPts val="0"/>
-              </a:spcBef>
-              <a:spcAft>
-                <a:spcPts val="0"/>
-              </a:spcAft>
-              <a:buClr>
-                <a:srgbClr val="1D7A6E"/>
-              </a:buClr>
-              <a:buSzPts val="1100"/>
-              <a:buFont typeface="Calibri"/>
-              <a:buNone/>
-            </a:pPr>
-            <a:r>
-              <a:rPr b="1" lang="en-US" sz="1100">
-                <a:solidFill>
-                  <a:srgbClr val="1D7A6E"/>
-                </a:solidFill>
-                <a:latin typeface="Calibri"/>
-                <a:ea typeface="Calibri"/>
-                <a:cs typeface="Calibri"/>
-                <a:sym typeface="Calibri"/>
-              </a:rPr>
-              <a:t>Frontend e integraciones</a:t>
-            </a:r>
-            <a:endParaRPr sz="1100">
-              <a:solidFill>
-                <a:schemeClr val="dk1"/>
-              </a:solidFill>
-              <a:latin typeface="Calibri"/>
-              <a:ea typeface="Calibri"/>
-              <a:cs typeface="Calibri"/>
-              <a:sym typeface="Calibri"/>
-            </a:endParaRPr>
-          </a:p>
-        </p:txBody>
-      </p:sp>
-      <p:sp>
-        <p:nvSpPr>
-          <p:cNvPr id="412" name="Google Shape;412;p12"/>
-          <p:cNvSpPr txBox="1"/>
-          <p:nvPr/>
-        </p:nvSpPr>
-        <p:spPr>
-          <a:xfrm>
-            <a:off x="4535424" y="2331720"/>
-            <a:ext cx="2926080" cy="777240"/>
-          </a:xfrm>
-          <a:prstGeom prst="rect">
-            <a:avLst/>
-          </a:prstGeom>
-          <a:noFill/>
-          <a:ln>
-            <a:noFill/>
-          </a:ln>
-        </p:spPr>
-        <p:txBody>
-          <a:bodyPr anchorCtr="0" anchor="ctr" bIns="0" lIns="0" spcFirstLastPara="1" rIns="0" wrap="square" tIns="0">
-            <a:noAutofit/>
-          </a:bodyPr>
-          <a:lstStyle/>
-          <a:p>
-            <a:pPr indent="0" lvl="0" marL="0" marR="0" rtl="0" algn="l">
-              <a:spcBef>
-                <a:spcPts val="0"/>
-              </a:spcBef>
-              <a:spcAft>
-                <a:spcPts val="0"/>
-              </a:spcAft>
-              <a:buClr>
-                <a:srgbClr val="5C6675"/>
-              </a:buClr>
-              <a:buSzPts val="1100"/>
-              <a:buFont typeface="Calibri"/>
-              <a:buNone/>
-            </a:pPr>
-            <a:r>
-              <a:rPr lang="en-US" sz="1100">
-                <a:solidFill>
-                  <a:srgbClr val="5C6675"/>
-                </a:solidFill>
-                <a:latin typeface="Calibri"/>
-                <a:ea typeface="Calibri"/>
-                <a:cs typeface="Calibri"/>
-                <a:sym typeface="Calibri"/>
-              </a:rPr>
-              <a:t>Dashboard, avance en tiempo real, envío por correo y automatización desde el calendario.</a:t>
-            </a:r>
-            <a:endParaRPr sz="1100">
-              <a:solidFill>
-                <a:schemeClr val="dk1"/>
-              </a:solidFill>
-              <a:latin typeface="Calibri"/>
-              <a:ea typeface="Calibri"/>
-              <a:cs typeface="Calibri"/>
-              <a:sym typeface="Calibri"/>
-            </a:endParaRPr>
-          </a:p>
-        </p:txBody>
-      </p:sp>
-      <p:sp>
-        <p:nvSpPr>
-          <p:cNvPr id="413" name="Google Shape;413;p12"/>
-          <p:cNvSpPr/>
-          <p:nvPr/>
-        </p:nvSpPr>
-        <p:spPr>
-          <a:xfrm>
-            <a:off x="7955280" y="1481328"/>
-            <a:ext cx="3383280" cy="1691640"/>
-          </a:xfrm>
-          <a:prstGeom prst="roundRect">
-            <a:avLst>
-              <a:gd fmla="val 3243" name="adj"/>
-            </a:avLst>
-          </a:prstGeom>
-          <a:solidFill>
-            <a:srgbClr val="FFFFFF"/>
-          </a:solidFill>
-          <a:ln cap="flat" cmpd="sng" w="9525">
-            <a:solidFill>
-              <a:srgbClr val="D8DEE9"/>
-            </a:solidFill>
-            <a:prstDash val="solid"/>
-            <a:round/>
-            <a:headEnd len="sm" w="sm" type="none"/>
-            <a:tailEnd len="sm" w="sm" type="none"/>
-          </a:ln>
-        </p:spPr>
-        <p:txBody>
-          <a:bodyPr anchorCtr="0" anchor="t" bIns="45700" lIns="91425" spcFirstLastPara="1" rIns="91425" wrap="square" tIns="45700">
-            <a:noAutofit/>
-          </a:bodyPr>
-          <a:lstStyle/>
-          <a:p>
-            <a:pPr indent="0" lvl="0" marL="0" marR="0" rtl="0" algn="l">
-              <a:spcBef>
-                <a:spcPts val="0"/>
-              </a:spcBef>
-              <a:spcAft>
-                <a:spcPts val="0"/>
-              </a:spcAft>
-              <a:buNone/>
-            </a:pPr>
-            <a:r>
-              <a:t/>
-            </a:r>
-            <a:endParaRPr sz="1800">
-              <a:solidFill>
-                <a:schemeClr val="dk1"/>
-              </a:solidFill>
-              <a:latin typeface="Calibri"/>
-              <a:ea typeface="Calibri"/>
-              <a:cs typeface="Calibri"/>
-              <a:sym typeface="Calibri"/>
-            </a:endParaRPr>
-          </a:p>
-        </p:txBody>
-      </p:sp>
-      <p:sp>
-        <p:nvSpPr>
-          <p:cNvPr id="414" name="Google Shape;414;p12"/>
-          <p:cNvSpPr/>
-          <p:nvPr/>
-        </p:nvSpPr>
-        <p:spPr>
-          <a:xfrm>
-            <a:off x="8193024" y="1691640"/>
-            <a:ext cx="420624" cy="420624"/>
-          </a:xfrm>
-          <a:prstGeom prst="ellipse">
-            <a:avLst/>
-          </a:prstGeom>
-          <a:solidFill>
-            <a:srgbClr val="B7791F"/>
-          </a:solidFill>
-          <a:ln cap="flat" cmpd="sng" w="12700">
-            <a:solidFill>
-              <a:srgbClr val="B7791F"/>
-            </a:solidFill>
-            <a:prstDash val="solid"/>
-            <a:round/>
-            <a:headEnd len="sm" w="sm" type="none"/>
-            <a:tailEnd len="sm" w="sm" type="none"/>
-          </a:ln>
-        </p:spPr>
-        <p:txBody>
-          <a:bodyPr anchorCtr="0" anchor="t" bIns="45700" lIns="91425" spcFirstLastPara="1" rIns="91425" wrap="square" tIns="45700">
-            <a:noAutofit/>
-          </a:bodyPr>
-          <a:lstStyle/>
-          <a:p>
-            <a:pPr indent="0" lvl="0" marL="0" marR="0" rtl="0" algn="l">
-              <a:spcBef>
-                <a:spcPts val="0"/>
-              </a:spcBef>
-              <a:spcAft>
-                <a:spcPts val="0"/>
-              </a:spcAft>
-              <a:buNone/>
-            </a:pPr>
-            <a:r>
-              <a:t/>
-            </a:r>
-            <a:endParaRPr sz="1800">
-              <a:solidFill>
-                <a:schemeClr val="dk1"/>
-              </a:solidFill>
-              <a:latin typeface="Calibri"/>
-              <a:ea typeface="Calibri"/>
-              <a:cs typeface="Calibri"/>
-              <a:sym typeface="Calibri"/>
-            </a:endParaRPr>
-          </a:p>
-        </p:txBody>
-      </p:sp>
-      <p:sp>
-        <p:nvSpPr>
-          <p:cNvPr id="415" name="Google Shape;415;p12"/>
-          <p:cNvSpPr txBox="1"/>
-          <p:nvPr/>
-        </p:nvSpPr>
-        <p:spPr>
-          <a:xfrm>
-            <a:off x="8193024" y="1691640"/>
-            <a:ext cx="420624" cy="420624"/>
-          </a:xfrm>
-          <a:prstGeom prst="rect">
-            <a:avLst/>
-          </a:prstGeom>
-          <a:noFill/>
-          <a:ln>
-            <a:noFill/>
-          </a:ln>
-        </p:spPr>
-        <p:txBody>
-          <a:bodyPr anchorCtr="0" anchor="ctr" bIns="0" lIns="0" spcFirstLastPara="1" rIns="0" wrap="square" tIns="0">
-            <a:noAutofit/>
-          </a:bodyPr>
-          <a:lstStyle/>
-          <a:p>
-            <a:pPr indent="0" lvl="0" marL="0" marR="0" rtl="0" algn="ctr">
-              <a:spcBef>
-                <a:spcPts val="0"/>
-              </a:spcBef>
-              <a:spcAft>
-                <a:spcPts val="0"/>
-              </a:spcAft>
-              <a:buClr>
-                <a:srgbClr val="FFFFFF"/>
-              </a:buClr>
-              <a:buSzPts val="1200"/>
-              <a:buFont typeface="Calibri"/>
-              <a:buNone/>
-            </a:pPr>
-            <a:r>
-              <a:rPr b="1" lang="en-US" sz="1200">
-                <a:solidFill>
-                  <a:srgbClr val="FFFFFF"/>
-                </a:solidFill>
-                <a:latin typeface="Calibri"/>
-                <a:ea typeface="Calibri"/>
-                <a:cs typeface="Calibri"/>
-                <a:sym typeface="Calibri"/>
-              </a:rPr>
-              <a:t>FD</a:t>
-            </a:r>
-            <a:endParaRPr sz="1200">
-              <a:solidFill>
-                <a:schemeClr val="dk1"/>
-              </a:solidFill>
-              <a:latin typeface="Calibri"/>
-              <a:ea typeface="Calibri"/>
-              <a:cs typeface="Calibri"/>
-              <a:sym typeface="Calibri"/>
-            </a:endParaRPr>
-          </a:p>
-        </p:txBody>
-      </p:sp>
-      <p:sp>
-        <p:nvSpPr>
-          <p:cNvPr id="416" name="Google Shape;416;p12"/>
-          <p:cNvSpPr txBox="1"/>
-          <p:nvPr/>
-        </p:nvSpPr>
-        <p:spPr>
-          <a:xfrm>
-            <a:off x="8723376" y="1700784"/>
-            <a:ext cx="2468880" cy="256032"/>
-          </a:xfrm>
-          <a:prstGeom prst="rect">
-            <a:avLst/>
-          </a:prstGeom>
-          <a:noFill/>
-          <a:ln>
-            <a:noFill/>
-          </a:ln>
-        </p:spPr>
-        <p:txBody>
-          <a:bodyPr anchorCtr="0" anchor="ctr" bIns="0" lIns="0" spcFirstLastPara="1" rIns="0" wrap="square" tIns="0">
-            <a:noAutofit/>
-          </a:bodyPr>
-          <a:lstStyle/>
-          <a:p>
-            <a:pPr indent="0" lvl="0" marL="0" marR="0" rtl="0" algn="l">
-              <a:spcBef>
-                <a:spcPts val="0"/>
-              </a:spcBef>
-              <a:spcAft>
-                <a:spcPts val="0"/>
-              </a:spcAft>
-              <a:buClr>
-                <a:srgbClr val="1E2761"/>
-              </a:buClr>
-              <a:buSzPts val="1350"/>
-              <a:buFont typeface="Cambria"/>
-              <a:buNone/>
-            </a:pPr>
-            <a:r>
-              <a:rPr b="1" lang="en-US" sz="1350">
-                <a:solidFill>
-                  <a:srgbClr val="1E2761"/>
-                </a:solidFill>
-                <a:latin typeface="Cambria"/>
-                <a:ea typeface="Cambria"/>
-                <a:cs typeface="Cambria"/>
-                <a:sym typeface="Cambria"/>
-              </a:rPr>
-              <a:t>Felipe Docmac</a:t>
-            </a:r>
-            <a:endParaRPr sz="1350">
-              <a:solidFill>
-                <a:schemeClr val="dk1"/>
-              </a:solidFill>
-              <a:latin typeface="Calibri"/>
-              <a:ea typeface="Calibri"/>
-              <a:cs typeface="Calibri"/>
-              <a:sym typeface="Calibri"/>
-            </a:endParaRPr>
-          </a:p>
-        </p:txBody>
-      </p:sp>
-      <p:sp>
-        <p:nvSpPr>
-          <p:cNvPr id="417" name="Google Shape;417;p12"/>
-          <p:cNvSpPr txBox="1"/>
-          <p:nvPr/>
-        </p:nvSpPr>
-        <p:spPr>
-          <a:xfrm>
-            <a:off x="8723376" y="1938528"/>
-            <a:ext cx="2468880" cy="237744"/>
-          </a:xfrm>
-          <a:prstGeom prst="rect">
-            <a:avLst/>
-          </a:prstGeom>
-          <a:noFill/>
-          <a:ln>
-            <a:noFill/>
-          </a:ln>
-        </p:spPr>
-        <p:txBody>
-          <a:bodyPr anchorCtr="0" anchor="ctr" bIns="0" lIns="0" spcFirstLastPara="1" rIns="0" wrap="square" tIns="0">
-            <a:noAutofit/>
-          </a:bodyPr>
-          <a:lstStyle/>
-          <a:p>
-            <a:pPr indent="0" lvl="0" marL="0" marR="0" rtl="0" algn="l">
-              <a:spcBef>
-                <a:spcPts val="0"/>
-              </a:spcBef>
-              <a:spcAft>
-                <a:spcPts val="0"/>
-              </a:spcAft>
-              <a:buClr>
-                <a:srgbClr val="B7791F"/>
-              </a:buClr>
-              <a:buSzPts val="1100"/>
-              <a:buFont typeface="Calibri"/>
-              <a:buNone/>
-            </a:pPr>
-            <a:r>
-              <a:rPr b="1" lang="en-US" sz="1100">
-                <a:solidFill>
-                  <a:srgbClr val="B7791F"/>
-                </a:solidFill>
-                <a:latin typeface="Calibri"/>
-                <a:ea typeface="Calibri"/>
-                <a:cs typeface="Calibri"/>
-                <a:sym typeface="Calibri"/>
-              </a:rPr>
-              <a:t>Seguridad y calidad</a:t>
-            </a:r>
-            <a:endParaRPr sz="1100">
-              <a:solidFill>
-                <a:schemeClr val="dk1"/>
-              </a:solidFill>
-              <a:latin typeface="Calibri"/>
-              <a:ea typeface="Calibri"/>
-              <a:cs typeface="Calibri"/>
-              <a:sym typeface="Calibri"/>
-            </a:endParaRPr>
-          </a:p>
-        </p:txBody>
-      </p:sp>
-      <p:sp>
-        <p:nvSpPr>
-          <p:cNvPr id="418" name="Google Shape;418;p12"/>
-          <p:cNvSpPr txBox="1"/>
-          <p:nvPr/>
-        </p:nvSpPr>
-        <p:spPr>
-          <a:xfrm>
-            <a:off x="8193024" y="2331720"/>
-            <a:ext cx="2926080" cy="777240"/>
-          </a:xfrm>
-          <a:prstGeom prst="rect">
-            <a:avLst/>
-          </a:prstGeom>
-          <a:noFill/>
-          <a:ln>
-            <a:noFill/>
-          </a:ln>
-        </p:spPr>
-        <p:txBody>
-          <a:bodyPr anchorCtr="0" anchor="ctr" bIns="0" lIns="0" spcFirstLastPara="1" rIns="0" wrap="square" tIns="0">
-            <a:noAutofit/>
-          </a:bodyPr>
-          <a:lstStyle/>
-          <a:p>
-            <a:pPr indent="0" lvl="0" marL="0" marR="0" rtl="0" algn="l">
-              <a:spcBef>
-                <a:spcPts val="0"/>
-              </a:spcBef>
-              <a:spcAft>
-                <a:spcPts val="0"/>
-              </a:spcAft>
-              <a:buClr>
-                <a:srgbClr val="5C6675"/>
-              </a:buClr>
-              <a:buSzPts val="1100"/>
-              <a:buFont typeface="Calibri"/>
-              <a:buNone/>
-            </a:pPr>
-            <a:r>
-              <a:rPr lang="en-US" sz="1100">
-                <a:solidFill>
-                  <a:srgbClr val="5C6675"/>
-                </a:solidFill>
-                <a:latin typeface="Calibri"/>
-                <a:ea typeface="Calibri"/>
-                <a:cs typeface="Calibri"/>
-                <a:sym typeface="Calibri"/>
-              </a:rPr>
-              <a:t>Consolidación técnica, control de accesos, auditoría y plan de pruebas.</a:t>
-            </a:r>
-            <a:endParaRPr sz="1100">
-              <a:solidFill>
-                <a:schemeClr val="dk1"/>
-              </a:solidFill>
-              <a:latin typeface="Calibri"/>
-              <a:ea typeface="Calibri"/>
-              <a:cs typeface="Calibri"/>
-              <a:sym typeface="Calibri"/>
-            </a:endParaRPr>
-          </a:p>
-        </p:txBody>
-      </p:sp>
-      <p:sp>
-        <p:nvSpPr>
-          <p:cNvPr id="419" name="Google Shape;419;p12"/>
-          <p:cNvSpPr/>
-          <p:nvPr/>
-        </p:nvSpPr>
-        <p:spPr>
-          <a:xfrm>
-            <a:off x="640080" y="3401568"/>
-            <a:ext cx="5303520" cy="2514600"/>
-          </a:xfrm>
-          <a:prstGeom prst="roundRect">
-            <a:avLst>
-              <a:gd fmla="val 2182" name="adj"/>
-            </a:avLst>
-          </a:prstGeom>
-          <a:solidFill>
-            <a:srgbClr val="F2F5FA"/>
-          </a:solidFill>
-          <a:ln cap="flat" cmpd="sng" w="9525">
-            <a:solidFill>
-              <a:srgbClr val="D8DEE9"/>
-            </a:solidFill>
-            <a:prstDash val="solid"/>
-            <a:round/>
-            <a:headEnd len="sm" w="sm" type="none"/>
-            <a:tailEnd len="sm" w="sm" type="none"/>
-          </a:ln>
-        </p:spPr>
-        <p:txBody>
-          <a:bodyPr anchorCtr="0" anchor="t" bIns="45700" lIns="91425" spcFirstLastPara="1" rIns="91425" wrap="square" tIns="45700">
-            <a:noAutofit/>
-          </a:bodyPr>
-          <a:lstStyle/>
-          <a:p>
-            <a:pPr indent="0" lvl="0" marL="0" marR="0" rtl="0" algn="l">
-              <a:spcBef>
-                <a:spcPts val="0"/>
-              </a:spcBef>
-              <a:spcAft>
-                <a:spcPts val="0"/>
-              </a:spcAft>
-              <a:buNone/>
-            </a:pPr>
-            <a:r>
-              <a:t/>
-            </a:r>
-            <a:endParaRPr sz="1800">
-              <a:solidFill>
-                <a:schemeClr val="dk1"/>
-              </a:solidFill>
-              <a:latin typeface="Calibri"/>
-              <a:ea typeface="Calibri"/>
-              <a:cs typeface="Calibri"/>
-              <a:sym typeface="Calibri"/>
-            </a:endParaRPr>
-          </a:p>
-        </p:txBody>
-      </p:sp>
-      <p:sp>
-        <p:nvSpPr>
-          <p:cNvPr id="420" name="Google Shape;420;p12"/>
-          <p:cNvSpPr txBox="1"/>
-          <p:nvPr/>
-        </p:nvSpPr>
-        <p:spPr>
-          <a:xfrm>
-            <a:off x="914400" y="3584448"/>
-            <a:ext cx="4754880" cy="256032"/>
-          </a:xfrm>
-          <a:prstGeom prst="rect">
-            <a:avLst/>
-          </a:prstGeom>
-          <a:noFill/>
-          <a:ln>
-            <a:noFill/>
-          </a:ln>
-        </p:spPr>
-        <p:txBody>
-          <a:bodyPr anchorCtr="0" anchor="ctr" bIns="0" lIns="0" spcFirstLastPara="1" rIns="0" wrap="square" tIns="0">
-            <a:noAutofit/>
-          </a:bodyPr>
-          <a:lstStyle/>
-          <a:p>
-            <a:pPr indent="0" lvl="0" marL="0" marR="0" rtl="0" algn="l">
-              <a:spcBef>
-                <a:spcPts val="0"/>
-              </a:spcBef>
-              <a:spcAft>
-                <a:spcPts val="0"/>
-              </a:spcAft>
-              <a:buClr>
-                <a:srgbClr val="1E2761"/>
-              </a:buClr>
-              <a:buSzPts val="1050"/>
-              <a:buFont typeface="Calibri"/>
-              <a:buNone/>
-            </a:pPr>
-            <a:r>
-              <a:rPr b="1" lang="en-US" sz="1050">
-                <a:solidFill>
-                  <a:srgbClr val="1E2761"/>
-                </a:solidFill>
-                <a:latin typeface="Calibri"/>
-                <a:ea typeface="Calibri"/>
-                <a:cs typeface="Calibri"/>
-                <a:sym typeface="Calibri"/>
-              </a:rPr>
-              <a:t>CINCO EVIDENCIAS DE AVANCE</a:t>
-            </a:r>
-            <a:endParaRPr sz="1050">
-              <a:solidFill>
-                <a:schemeClr val="dk1"/>
-              </a:solidFill>
-              <a:latin typeface="Calibri"/>
-              <a:ea typeface="Calibri"/>
-              <a:cs typeface="Calibri"/>
-              <a:sym typeface="Calibri"/>
-            </a:endParaRPr>
-          </a:p>
-        </p:txBody>
-      </p:sp>
-      <p:sp>
-        <p:nvSpPr>
-          <p:cNvPr id="421" name="Google Shape;421;p12"/>
-          <p:cNvSpPr txBox="1"/>
-          <p:nvPr/>
-        </p:nvSpPr>
-        <p:spPr>
-          <a:xfrm>
-            <a:off x="914400" y="3913632"/>
-            <a:ext cx="4754880" cy="310896"/>
-          </a:xfrm>
-          <a:prstGeom prst="rect">
-            <a:avLst/>
-          </a:prstGeom>
-          <a:noFill/>
-          <a:ln>
-            <a:noFill/>
-          </a:ln>
-        </p:spPr>
-        <p:txBody>
-          <a:bodyPr anchorCtr="0" anchor="ctr" bIns="0" lIns="0" spcFirstLastPara="1" rIns="0" wrap="square" tIns="0">
-            <a:noAutofit/>
-          </a:bodyPr>
-          <a:lstStyle/>
-          <a:p>
-            <a:pPr indent="0" lvl="0" marL="0" marR="0" rtl="0" algn="l">
-              <a:spcBef>
-                <a:spcPts val="0"/>
-              </a:spcBef>
-              <a:spcAft>
-                <a:spcPts val="0"/>
-              </a:spcAft>
-              <a:buClr>
-                <a:srgbClr val="1B2233"/>
-              </a:buClr>
-              <a:buSzPts val="1150"/>
-              <a:buFont typeface="Calibri"/>
-              <a:buNone/>
-            </a:pPr>
-            <a:r>
-              <a:rPr lang="en-US" sz="1150">
-                <a:solidFill>
-                  <a:srgbClr val="1B2233"/>
-                </a:solidFill>
-                <a:latin typeface="Calibri"/>
-                <a:ea typeface="Calibri"/>
-                <a:cs typeface="Calibri"/>
-                <a:sym typeface="Calibri"/>
-              </a:rPr>
-              <a:t>·  Diagnóstico y priorización de brechas</a:t>
-            </a:r>
-            <a:endParaRPr sz="1150">
-              <a:solidFill>
-                <a:schemeClr val="dk1"/>
-              </a:solidFill>
-              <a:latin typeface="Calibri"/>
-              <a:ea typeface="Calibri"/>
-              <a:cs typeface="Calibri"/>
-              <a:sym typeface="Calibri"/>
-            </a:endParaRPr>
-          </a:p>
-        </p:txBody>
-      </p:sp>
-      <p:sp>
-        <p:nvSpPr>
-          <p:cNvPr id="422" name="Google Shape;422;p12"/>
-          <p:cNvSpPr txBox="1"/>
-          <p:nvPr/>
-        </p:nvSpPr>
-        <p:spPr>
-          <a:xfrm>
-            <a:off x="914400" y="4279392"/>
-            <a:ext cx="4754880" cy="310896"/>
-          </a:xfrm>
-          <a:prstGeom prst="rect">
-            <a:avLst/>
-          </a:prstGeom>
-          <a:noFill/>
-          <a:ln>
-            <a:noFill/>
-          </a:ln>
-        </p:spPr>
-        <p:txBody>
-          <a:bodyPr anchorCtr="0" anchor="ctr" bIns="0" lIns="0" spcFirstLastPara="1" rIns="0" wrap="square" tIns="0">
-            <a:noAutofit/>
-          </a:bodyPr>
-          <a:lstStyle/>
-          <a:p>
-            <a:pPr indent="0" lvl="0" marL="0" marR="0" rtl="0" algn="l">
-              <a:spcBef>
-                <a:spcPts val="0"/>
-              </a:spcBef>
-              <a:spcAft>
-                <a:spcPts val="0"/>
-              </a:spcAft>
-              <a:buClr>
-                <a:srgbClr val="1B2233"/>
-              </a:buClr>
-              <a:buSzPts val="1150"/>
-              <a:buFont typeface="Calibri"/>
-              <a:buNone/>
-            </a:pPr>
-            <a:r>
-              <a:rPr lang="en-US" sz="1150">
-                <a:solidFill>
-                  <a:srgbClr val="1B2233"/>
-                </a:solidFill>
-                <a:latin typeface="Calibri"/>
-                <a:ea typeface="Calibri"/>
-                <a:cs typeface="Calibri"/>
-                <a:sym typeface="Calibri"/>
-              </a:rPr>
-              <a:t>·  Informe de deuda técnica: inicio y entrega</a:t>
-            </a:r>
-            <a:endParaRPr sz="1150">
-              <a:solidFill>
-                <a:schemeClr val="dk1"/>
-              </a:solidFill>
-              <a:latin typeface="Calibri"/>
-              <a:ea typeface="Calibri"/>
-              <a:cs typeface="Calibri"/>
-              <a:sym typeface="Calibri"/>
-            </a:endParaRPr>
-          </a:p>
-        </p:txBody>
-      </p:sp>
-      <p:sp>
-        <p:nvSpPr>
-          <p:cNvPr id="423" name="Google Shape;423;p12"/>
-          <p:cNvSpPr txBox="1"/>
-          <p:nvPr/>
-        </p:nvSpPr>
-        <p:spPr>
-          <a:xfrm>
-            <a:off x="914400" y="4645152"/>
-            <a:ext cx="4754880" cy="310896"/>
-          </a:xfrm>
-          <a:prstGeom prst="rect">
-            <a:avLst/>
-          </a:prstGeom>
-          <a:noFill/>
-          <a:ln>
-            <a:noFill/>
-          </a:ln>
-        </p:spPr>
-        <p:txBody>
-          <a:bodyPr anchorCtr="0" anchor="ctr" bIns="0" lIns="0" spcFirstLastPara="1" rIns="0" wrap="square" tIns="0">
-            <a:noAutofit/>
-          </a:bodyPr>
-          <a:lstStyle/>
-          <a:p>
-            <a:pPr indent="0" lvl="0" marL="0" marR="0" rtl="0" algn="l">
-              <a:spcBef>
-                <a:spcPts val="0"/>
-              </a:spcBef>
-              <a:spcAft>
-                <a:spcPts val="0"/>
-              </a:spcAft>
-              <a:buClr>
-                <a:srgbClr val="1B2233"/>
-              </a:buClr>
-              <a:buSzPts val="1150"/>
-              <a:buFont typeface="Calibri"/>
-              <a:buNone/>
-            </a:pPr>
-            <a:r>
-              <a:rPr lang="en-US" sz="1150">
-                <a:solidFill>
-                  <a:srgbClr val="1B2233"/>
-                </a:solidFill>
-                <a:latin typeface="Calibri"/>
-                <a:ea typeface="Calibri"/>
-                <a:cs typeface="Calibri"/>
-                <a:sym typeface="Calibri"/>
-              </a:rPr>
-              <a:t>·  Documento de diseño de la solución</a:t>
-            </a:r>
-            <a:endParaRPr sz="1150">
-              <a:solidFill>
-                <a:schemeClr val="dk1"/>
-              </a:solidFill>
-              <a:latin typeface="Calibri"/>
-              <a:ea typeface="Calibri"/>
-              <a:cs typeface="Calibri"/>
-              <a:sym typeface="Calibri"/>
-            </a:endParaRPr>
-          </a:p>
-        </p:txBody>
-      </p:sp>
-      <p:sp>
-        <p:nvSpPr>
-          <p:cNvPr id="424" name="Google Shape;424;p12"/>
-          <p:cNvSpPr txBox="1"/>
-          <p:nvPr/>
-        </p:nvSpPr>
-        <p:spPr>
-          <a:xfrm>
-            <a:off x="914400" y="5010912"/>
-            <a:ext cx="4754880" cy="310896"/>
-          </a:xfrm>
-          <a:prstGeom prst="rect">
-            <a:avLst/>
-          </a:prstGeom>
-          <a:noFill/>
-          <a:ln>
-            <a:noFill/>
-          </a:ln>
-        </p:spPr>
-        <p:txBody>
-          <a:bodyPr anchorCtr="0" anchor="ctr" bIns="0" lIns="0" spcFirstLastPara="1" rIns="0" wrap="square" tIns="0">
-            <a:noAutofit/>
-          </a:bodyPr>
-          <a:lstStyle/>
-          <a:p>
-            <a:pPr indent="0" lvl="0" marL="0" marR="0" rtl="0" algn="l">
-              <a:spcBef>
-                <a:spcPts val="0"/>
-              </a:spcBef>
-              <a:spcAft>
-                <a:spcPts val="0"/>
-              </a:spcAft>
-              <a:buNone/>
-            </a:pPr>
-            <a:r>
-              <a:rPr lang="en-US" sz="1150">
-                <a:solidFill>
-                  <a:srgbClr val="1B2233"/>
-                </a:solidFill>
-                <a:latin typeface="Calibri"/>
-                <a:ea typeface="Calibri"/>
-                <a:cs typeface="Calibri"/>
-                <a:sym typeface="Calibri"/>
-              </a:rPr>
-              <a:t>·  Repositorio con los agentes operativos</a:t>
-            </a:r>
-            <a:endParaRPr sz="1150">
-              <a:solidFill>
-                <a:schemeClr val="dk1"/>
-              </a:solidFill>
-              <a:latin typeface="Calibri"/>
-              <a:ea typeface="Calibri"/>
-              <a:cs typeface="Calibri"/>
-              <a:sym typeface="Calibri"/>
-            </a:endParaRPr>
-          </a:p>
-        </p:txBody>
-      </p:sp>
-      <p:sp>
-        <p:nvSpPr>
-          <p:cNvPr id="425" name="Google Shape;425;p12"/>
-          <p:cNvSpPr txBox="1"/>
-          <p:nvPr/>
-        </p:nvSpPr>
-        <p:spPr>
-          <a:xfrm>
-            <a:off x="914400" y="5376672"/>
-            <a:ext cx="4754880" cy="310896"/>
-          </a:xfrm>
-          <a:prstGeom prst="rect">
-            <a:avLst/>
-          </a:prstGeom>
-          <a:noFill/>
-          <a:ln>
-            <a:noFill/>
-          </a:ln>
-        </p:spPr>
-        <p:txBody>
-          <a:bodyPr anchorCtr="0" anchor="ctr" bIns="0" lIns="0" spcFirstLastPara="1" rIns="0" wrap="square" tIns="0">
-            <a:noAutofit/>
-          </a:bodyPr>
-          <a:lstStyle/>
-          <a:p>
-            <a:pPr indent="0" lvl="0" marL="0" marR="0" rtl="0" algn="l">
-              <a:spcBef>
-                <a:spcPts val="0"/>
-              </a:spcBef>
-              <a:spcAft>
-                <a:spcPts val="0"/>
-              </a:spcAft>
-              <a:buClr>
-                <a:srgbClr val="1B2233"/>
-              </a:buClr>
-              <a:buSzPts val="1150"/>
-              <a:buFont typeface="Calibri"/>
-              <a:buNone/>
-            </a:pPr>
-            <a:r>
-              <a:rPr lang="en-US" sz="1150">
-                <a:solidFill>
-                  <a:srgbClr val="1B2233"/>
-                </a:solidFill>
-                <a:latin typeface="Calibri"/>
-                <a:ea typeface="Calibri"/>
-                <a:cs typeface="Calibri"/>
-                <a:sym typeface="Calibri"/>
-              </a:rPr>
-              <a:t>·  Dashboard con avance en tiempo real</a:t>
-            </a:r>
-            <a:endParaRPr sz="1150">
-              <a:solidFill>
-                <a:schemeClr val="dk1"/>
-              </a:solidFill>
-              <a:latin typeface="Calibri"/>
-              <a:ea typeface="Calibri"/>
-              <a:cs typeface="Calibri"/>
-              <a:sym typeface="Calibri"/>
-            </a:endParaRPr>
-          </a:p>
-        </p:txBody>
-      </p:sp>
-      <p:sp>
-        <p:nvSpPr>
-          <p:cNvPr id="426" name="Google Shape;426;p12"/>
-          <p:cNvSpPr/>
-          <p:nvPr/>
-        </p:nvSpPr>
-        <p:spPr>
-          <a:xfrm>
-            <a:off x="6245352" y="3401568"/>
-            <a:ext cx="5303520" cy="2514600"/>
-          </a:xfrm>
-          <a:prstGeom prst="roundRect">
-            <a:avLst>
-              <a:gd fmla="val 2182" name="adj"/>
-            </a:avLst>
-          </a:prstGeom>
-          <a:solidFill>
-            <a:srgbClr val="F2F5FA"/>
-          </a:solidFill>
-          <a:ln cap="flat" cmpd="sng" w="9525">
-            <a:solidFill>
-              <a:srgbClr val="D8DEE9"/>
-            </a:solidFill>
-            <a:prstDash val="solid"/>
-            <a:round/>
-            <a:headEnd len="sm" w="sm" type="none"/>
-            <a:tailEnd len="sm" w="sm" type="none"/>
-          </a:ln>
-        </p:spPr>
-        <p:txBody>
-          <a:bodyPr anchorCtr="0" anchor="t" bIns="45700" lIns="91425" spcFirstLastPara="1" rIns="91425" wrap="square" tIns="45700">
-            <a:noAutofit/>
-          </a:bodyPr>
-          <a:lstStyle/>
-          <a:p>
-            <a:pPr indent="0" lvl="0" marL="0" marR="0" rtl="0" algn="l">
-              <a:spcBef>
-                <a:spcPts val="0"/>
-              </a:spcBef>
-              <a:spcAft>
-                <a:spcPts val="0"/>
-              </a:spcAft>
-              <a:buNone/>
-            </a:pPr>
-            <a:r>
-              <a:t/>
-            </a:r>
-            <a:endParaRPr sz="1800">
-              <a:solidFill>
-                <a:schemeClr val="dk1"/>
-              </a:solidFill>
-              <a:latin typeface="Calibri"/>
-              <a:ea typeface="Calibri"/>
-              <a:cs typeface="Calibri"/>
-              <a:sym typeface="Calibri"/>
-            </a:endParaRPr>
-          </a:p>
-        </p:txBody>
-      </p:sp>
-      <p:sp>
-        <p:nvSpPr>
-          <p:cNvPr id="427" name="Google Shape;427;p12"/>
-          <p:cNvSpPr txBox="1"/>
-          <p:nvPr/>
-        </p:nvSpPr>
-        <p:spPr>
-          <a:xfrm>
-            <a:off x="6519672" y="3584448"/>
-            <a:ext cx="4754880" cy="256032"/>
-          </a:xfrm>
-          <a:prstGeom prst="rect">
-            <a:avLst/>
-          </a:prstGeom>
-          <a:noFill/>
-          <a:ln>
-            <a:noFill/>
-          </a:ln>
-        </p:spPr>
-        <p:txBody>
-          <a:bodyPr anchorCtr="0" anchor="ctr" bIns="0" lIns="0" spcFirstLastPara="1" rIns="0" wrap="square" tIns="0">
-            <a:noAutofit/>
-          </a:bodyPr>
-          <a:lstStyle/>
-          <a:p>
-            <a:pPr indent="0" lvl="0" marL="0" marR="0" rtl="0" algn="l">
-              <a:spcBef>
-                <a:spcPts val="0"/>
-              </a:spcBef>
-              <a:spcAft>
-                <a:spcPts val="0"/>
-              </a:spcAft>
-              <a:buClr>
-                <a:srgbClr val="B7791F"/>
-              </a:buClr>
-              <a:buSzPts val="1050"/>
-              <a:buFont typeface="Calibri"/>
-              <a:buNone/>
-            </a:pPr>
-            <a:r>
-              <a:rPr b="1" lang="en-US" sz="1050">
-                <a:solidFill>
-                  <a:srgbClr val="B7791F"/>
-                </a:solidFill>
-                <a:latin typeface="Calibri"/>
-                <a:ea typeface="Calibri"/>
-                <a:cs typeface="Calibri"/>
-                <a:sym typeface="Calibri"/>
-              </a:rPr>
-              <a:t>CUATRO EVIDENCIAS FINALES</a:t>
-            </a:r>
-            <a:endParaRPr sz="1050">
-              <a:solidFill>
-                <a:schemeClr val="dk1"/>
-              </a:solidFill>
-              <a:latin typeface="Calibri"/>
-              <a:ea typeface="Calibri"/>
-              <a:cs typeface="Calibri"/>
-              <a:sym typeface="Calibri"/>
-            </a:endParaRPr>
-          </a:p>
-        </p:txBody>
-      </p:sp>
-      <p:sp>
-        <p:nvSpPr>
-          <p:cNvPr id="428" name="Google Shape;428;p12"/>
-          <p:cNvSpPr txBox="1"/>
-          <p:nvPr/>
-        </p:nvSpPr>
-        <p:spPr>
-          <a:xfrm>
-            <a:off x="6519672" y="3913632"/>
-            <a:ext cx="4754880" cy="310896"/>
-          </a:xfrm>
-          <a:prstGeom prst="rect">
-            <a:avLst/>
-          </a:prstGeom>
-          <a:noFill/>
-          <a:ln>
-            <a:noFill/>
-          </a:ln>
-        </p:spPr>
-        <p:txBody>
-          <a:bodyPr anchorCtr="0" anchor="ctr" bIns="0" lIns="0" spcFirstLastPara="1" rIns="0" wrap="square" tIns="0">
-            <a:noAutofit/>
-          </a:bodyPr>
-          <a:lstStyle/>
-          <a:p>
-            <a:pPr indent="0" lvl="0" marL="0" marR="0" rtl="0" algn="l">
-              <a:spcBef>
-                <a:spcPts val="0"/>
-              </a:spcBef>
-              <a:spcAft>
-                <a:spcPts val="0"/>
-              </a:spcAft>
-              <a:buClr>
-                <a:srgbClr val="1B2233"/>
-              </a:buClr>
-              <a:buSzPts val="1150"/>
-              <a:buFont typeface="Calibri"/>
-              <a:buNone/>
-            </a:pPr>
-            <a:r>
-              <a:rPr lang="en-US" sz="1150">
-                <a:solidFill>
-                  <a:srgbClr val="1B2233"/>
-                </a:solidFill>
-                <a:latin typeface="Calibri"/>
-                <a:ea typeface="Calibri"/>
-                <a:cs typeface="Calibri"/>
-                <a:sym typeface="Calibri"/>
-              </a:rPr>
-              <a:t>·  Sistema en funcionamiento con envío por correo</a:t>
-            </a:r>
-            <a:endParaRPr sz="1150">
-              <a:solidFill>
-                <a:schemeClr val="dk1"/>
-              </a:solidFill>
-              <a:latin typeface="Calibri"/>
-              <a:ea typeface="Calibri"/>
-              <a:cs typeface="Calibri"/>
-              <a:sym typeface="Calibri"/>
-            </a:endParaRPr>
-          </a:p>
-        </p:txBody>
-      </p:sp>
-      <p:sp>
-        <p:nvSpPr>
-          <p:cNvPr id="429" name="Google Shape;429;p12"/>
-          <p:cNvSpPr txBox="1"/>
-          <p:nvPr/>
-        </p:nvSpPr>
-        <p:spPr>
-          <a:xfrm>
-            <a:off x="6519672" y="4279392"/>
-            <a:ext cx="4754880" cy="310896"/>
-          </a:xfrm>
-          <a:prstGeom prst="rect">
-            <a:avLst/>
-          </a:prstGeom>
-          <a:noFill/>
-          <a:ln>
-            <a:noFill/>
-          </a:ln>
-        </p:spPr>
-        <p:txBody>
-          <a:bodyPr anchorCtr="0" anchor="ctr" bIns="0" lIns="0" spcFirstLastPara="1" rIns="0" wrap="square" tIns="0">
-            <a:noAutofit/>
-          </a:bodyPr>
-          <a:lstStyle/>
-          <a:p>
-            <a:pPr indent="0" lvl="0" marL="0" marR="0" rtl="0" algn="l">
-              <a:spcBef>
-                <a:spcPts val="0"/>
-              </a:spcBef>
-              <a:spcAft>
-                <a:spcPts val="0"/>
-              </a:spcAft>
-              <a:buClr>
-                <a:srgbClr val="1B2233"/>
-              </a:buClr>
-              <a:buSzPts val="1150"/>
-              <a:buFont typeface="Calibri"/>
-              <a:buNone/>
-            </a:pPr>
-            <a:r>
-              <a:rPr lang="en-US" sz="1150">
-                <a:solidFill>
-                  <a:srgbClr val="1B2233"/>
-                </a:solidFill>
-                <a:latin typeface="Calibri"/>
-                <a:ea typeface="Calibri"/>
-                <a:cs typeface="Calibri"/>
-                <a:sym typeface="Calibri"/>
-              </a:rPr>
-              <a:t>·  Informe de pruebas, seguridad y resultados</a:t>
-            </a:r>
-            <a:endParaRPr sz="1150">
-              <a:solidFill>
-                <a:schemeClr val="dk1"/>
-              </a:solidFill>
-              <a:latin typeface="Calibri"/>
-              <a:ea typeface="Calibri"/>
-              <a:cs typeface="Calibri"/>
-              <a:sym typeface="Calibri"/>
-            </a:endParaRPr>
-          </a:p>
-        </p:txBody>
-      </p:sp>
-      <p:sp>
-        <p:nvSpPr>
-          <p:cNvPr id="430" name="Google Shape;430;p12"/>
-          <p:cNvSpPr txBox="1"/>
-          <p:nvPr/>
-        </p:nvSpPr>
-        <p:spPr>
-          <a:xfrm>
-            <a:off x="6519672" y="4645152"/>
-            <a:ext cx="4754880" cy="310896"/>
-          </a:xfrm>
-          <a:prstGeom prst="rect">
-            <a:avLst/>
-          </a:prstGeom>
-          <a:noFill/>
-          <a:ln>
-            <a:noFill/>
-          </a:ln>
-        </p:spPr>
-        <p:txBody>
-          <a:bodyPr anchorCtr="0" anchor="ctr" bIns="0" lIns="0" spcFirstLastPara="1" rIns="0" wrap="square" tIns="0">
-            <a:noAutofit/>
-          </a:bodyPr>
-          <a:lstStyle/>
-          <a:p>
-            <a:pPr indent="0" lvl="0" marL="0" marR="0" rtl="0" algn="l">
-              <a:spcBef>
-                <a:spcPts val="0"/>
-              </a:spcBef>
-              <a:spcAft>
-                <a:spcPts val="0"/>
-              </a:spcAft>
-              <a:buClr>
-                <a:srgbClr val="1B2233"/>
-              </a:buClr>
-              <a:buSzPts val="1150"/>
-              <a:buFont typeface="Calibri"/>
-              <a:buNone/>
-            </a:pPr>
-            <a:r>
-              <a:rPr lang="en-US" sz="1150">
-                <a:solidFill>
-                  <a:srgbClr val="1B2233"/>
-                </a:solidFill>
-                <a:latin typeface="Calibri"/>
-                <a:ea typeface="Calibri"/>
-                <a:cs typeface="Calibri"/>
-                <a:sym typeface="Calibri"/>
-              </a:rPr>
-              <a:t>·  Documentación técnica y manual de usuario</a:t>
-            </a:r>
-            <a:endParaRPr sz="1150">
-              <a:solidFill>
-                <a:schemeClr val="dk1"/>
-              </a:solidFill>
-              <a:latin typeface="Calibri"/>
-              <a:ea typeface="Calibri"/>
-              <a:cs typeface="Calibri"/>
-              <a:sym typeface="Calibri"/>
-            </a:endParaRPr>
-          </a:p>
-        </p:txBody>
-      </p:sp>
-      <p:sp>
-        <p:nvSpPr>
-          <p:cNvPr id="431" name="Google Shape;431;p12"/>
-          <p:cNvSpPr txBox="1"/>
-          <p:nvPr/>
-        </p:nvSpPr>
-        <p:spPr>
-          <a:xfrm>
-            <a:off x="6519672" y="5010912"/>
-            <a:ext cx="4754880" cy="310896"/>
-          </a:xfrm>
-          <a:prstGeom prst="rect">
-            <a:avLst/>
-          </a:prstGeom>
-          <a:noFill/>
-          <a:ln>
-            <a:noFill/>
-          </a:ln>
-        </p:spPr>
-        <p:txBody>
-          <a:bodyPr anchorCtr="0" anchor="ctr" bIns="0" lIns="0" spcFirstLastPara="1" rIns="0" wrap="square" tIns="0">
-            <a:noAutofit/>
-          </a:bodyPr>
-          <a:lstStyle/>
-          <a:p>
-            <a:pPr indent="0" lvl="0" marL="0" marR="0" rtl="0" algn="l">
-              <a:spcBef>
-                <a:spcPts val="0"/>
-              </a:spcBef>
-              <a:spcAft>
-                <a:spcPts val="0"/>
-              </a:spcAft>
-              <a:buClr>
-                <a:srgbClr val="1B2233"/>
-              </a:buClr>
-              <a:buSzPts val="1150"/>
-              <a:buFont typeface="Calibri"/>
-              <a:buNone/>
-            </a:pPr>
-            <a:r>
-              <a:rPr lang="en-US" sz="1150">
-                <a:solidFill>
-                  <a:srgbClr val="1B2233"/>
-                </a:solidFill>
-                <a:latin typeface="Calibri"/>
-                <a:ea typeface="Calibri"/>
-                <a:cs typeface="Calibri"/>
-                <a:sym typeface="Calibri"/>
-              </a:rPr>
-              <a:t>·  Informe final y presentación de defensa</a:t>
-            </a:r>
-            <a:endParaRPr sz="1150">
-              <a:solidFill>
-                <a:schemeClr val="dk1"/>
-              </a:solidFill>
-              <a:latin typeface="Calibri"/>
-              <a:ea typeface="Calibri"/>
-              <a:cs typeface="Calibri"/>
-              <a:sym typeface="Calibri"/>
-            </a:endParaRPr>
-          </a:p>
-        </p:txBody>
-      </p:sp>
-      <p:sp>
-        <p:nvSpPr>
-          <p:cNvPr id="432" name="Google Shape;432;p12"/>
-          <p:cNvSpPr txBox="1"/>
-          <p:nvPr/>
-        </p:nvSpPr>
-        <p:spPr>
-          <a:xfrm>
-            <a:off x="640080" y="6291072"/>
-            <a:ext cx="10881360" cy="274320"/>
-          </a:xfrm>
-          <a:prstGeom prst="rect">
-            <a:avLst/>
-          </a:prstGeom>
-          <a:noFill/>
-          <a:ln>
-            <a:noFill/>
-          </a:ln>
-        </p:spPr>
-        <p:txBody>
-          <a:bodyPr anchorCtr="0" anchor="ctr" bIns="0" lIns="0" spcFirstLastPara="1" rIns="0" wrap="square" tIns="0">
-            <a:noAutofit/>
-          </a:bodyPr>
-          <a:lstStyle/>
-          <a:p>
-            <a:pPr indent="0" lvl="0" marL="0" marR="0" rtl="0" algn="l">
-              <a:spcBef>
-                <a:spcPts val="0"/>
-              </a:spcBef>
-              <a:spcAft>
-                <a:spcPts val="0"/>
-              </a:spcAft>
-              <a:buClr>
-                <a:srgbClr val="5C6675"/>
-              </a:buClr>
-              <a:buSzPts val="1000"/>
-              <a:buFont typeface="Calibri"/>
-              <a:buNone/>
-            </a:pPr>
-            <a:r>
-              <a:rPr i="1" lang="en-US" sz="1000">
-                <a:solidFill>
-                  <a:srgbClr val="5C6675"/>
-                </a:solidFill>
-                <a:latin typeface="Calibri"/>
-                <a:ea typeface="Calibri"/>
-                <a:cs typeface="Calibri"/>
-                <a:sym typeface="Calibri"/>
-              </a:rPr>
-              <a:t>Cada evidencia responde a uno o más objetivos específicos y tiene una actividad del plan que la produce.</a:t>
-            </a:r>
-            <a:endParaRPr sz="1000">
-              <a:solidFill>
-                <a:schemeClr val="dk1"/>
-              </a:solidFill>
-              <a:latin typeface="Calibri"/>
-              <a:ea typeface="Calibri"/>
-              <a:cs typeface="Calibri"/>
-              <a:sym typeface="Calibri"/>
-            </a:endParaRPr>
-          </a:p>
-        </p:txBody>
-      </p:sp>
+      </p:pic>
     </p:spTree>
   </p:cSld>
   <p:clrMapOvr>
@@ -10884,13 +9065,13 @@
     <p:bg>
       <p:bgPr>
         <a:solidFill>
-          <a:srgbClr val="1E2761"/>
+          <a:srgbClr val="FFFFFF"/>
         </a:solidFill>
       </p:bgPr>
     </p:bg>
     <p:spTree>
       <p:nvGrpSpPr>
-        <p:cNvPr id="437" name="Shape 437"/>
+        <p:cNvPr id="404" name="Shape 404"/>
         <p:cNvGrpSpPr/>
         <p:nvPr/>
       </p:nvGrpSpPr>
@@ -10904,7 +9085,2138 @@
       </p:grpSpPr>
       <p:sp>
         <p:nvSpPr>
-          <p:cNvPr id="438" name="Google Shape;438;p13"/>
+          <p:cNvPr id="405" name="Google Shape;405;p12"/>
+          <p:cNvSpPr txBox="1"/>
+          <p:nvPr/>
+        </p:nvSpPr>
+        <p:spPr>
+          <a:xfrm>
+            <a:off x="640080" y="384048"/>
+            <a:ext cx="10058400" cy="237744"/>
+          </a:xfrm>
+          <a:prstGeom prst="rect">
+            <a:avLst/>
+          </a:prstGeom>
+          <a:noFill/>
+          <a:ln>
+            <a:noFill/>
+          </a:ln>
+        </p:spPr>
+        <p:txBody>
+          <a:bodyPr anchorCtr="0" anchor="ctr" bIns="0" lIns="0" spcFirstLastPara="1" rIns="0" wrap="square" tIns="0">
+            <a:noAutofit/>
+          </a:bodyPr>
+          <a:lstStyle/>
+          <a:p>
+            <a:pPr indent="0" lvl="0" marL="0" marR="0" rtl="0" algn="l">
+              <a:spcBef>
+                <a:spcPts val="0"/>
+              </a:spcBef>
+              <a:spcAft>
+                <a:spcPts val="0"/>
+              </a:spcAft>
+              <a:buClr>
+                <a:srgbClr val="B7791F"/>
+              </a:buClr>
+              <a:buSzPts val="1100"/>
+              <a:buFont typeface="Calibri"/>
+              <a:buNone/>
+            </a:pPr>
+            <a:r>
+              <a:rPr b="1" lang="en-US" sz="1100">
+                <a:solidFill>
+                  <a:srgbClr val="B7791F"/>
+                </a:solidFill>
+                <a:latin typeface="Calibri"/>
+                <a:ea typeface="Calibri"/>
+                <a:cs typeface="Calibri"/>
+                <a:sym typeface="Calibri"/>
+              </a:rPr>
+              <a:t>EQUIPO Y EVIDENCIAS</a:t>
+            </a:r>
+            <a:endParaRPr sz="1100">
+              <a:solidFill>
+                <a:schemeClr val="dk1"/>
+              </a:solidFill>
+              <a:latin typeface="Calibri"/>
+              <a:ea typeface="Calibri"/>
+              <a:cs typeface="Calibri"/>
+              <a:sym typeface="Calibri"/>
+            </a:endParaRPr>
+          </a:p>
+        </p:txBody>
+      </p:sp>
+      <p:sp>
+        <p:nvSpPr>
+          <p:cNvPr id="406" name="Google Shape;406;p12"/>
+          <p:cNvSpPr txBox="1"/>
+          <p:nvPr/>
+        </p:nvSpPr>
+        <p:spPr>
+          <a:xfrm>
+            <a:off x="640080" y="658368"/>
+            <a:ext cx="10881360" cy="566928"/>
+          </a:xfrm>
+          <a:prstGeom prst="rect">
+            <a:avLst/>
+          </a:prstGeom>
+          <a:noFill/>
+          <a:ln>
+            <a:noFill/>
+          </a:ln>
+        </p:spPr>
+        <p:txBody>
+          <a:bodyPr anchorCtr="0" anchor="ctr" bIns="0" lIns="0" spcFirstLastPara="1" rIns="0" wrap="square" tIns="0">
+            <a:noAutofit/>
+          </a:bodyPr>
+          <a:lstStyle/>
+          <a:p>
+            <a:pPr indent="0" lvl="0" marL="0" marR="0" rtl="0" algn="l">
+              <a:spcBef>
+                <a:spcPts val="0"/>
+              </a:spcBef>
+              <a:spcAft>
+                <a:spcPts val="0"/>
+              </a:spcAft>
+              <a:buClr>
+                <a:srgbClr val="1E2761"/>
+              </a:buClr>
+              <a:buSzPts val="3200"/>
+              <a:buFont typeface="Cambria"/>
+              <a:buNone/>
+            </a:pPr>
+            <a:r>
+              <a:rPr b="1" lang="en-US" sz="3200">
+                <a:solidFill>
+                  <a:srgbClr val="1E2761"/>
+                </a:solidFill>
+                <a:latin typeface="Cambria"/>
+                <a:ea typeface="Cambria"/>
+                <a:cs typeface="Cambria"/>
+                <a:sym typeface="Cambria"/>
+              </a:rPr>
+              <a:t>Quién responde por qué, y qué se entrega</a:t>
+            </a:r>
+            <a:endParaRPr sz="3200">
+              <a:solidFill>
+                <a:schemeClr val="dk1"/>
+              </a:solidFill>
+              <a:latin typeface="Calibri"/>
+              <a:ea typeface="Calibri"/>
+              <a:cs typeface="Calibri"/>
+              <a:sym typeface="Calibri"/>
+            </a:endParaRPr>
+          </a:p>
+        </p:txBody>
+      </p:sp>
+      <p:sp>
+        <p:nvSpPr>
+          <p:cNvPr id="407" name="Google Shape;407;p12"/>
+          <p:cNvSpPr/>
+          <p:nvPr/>
+        </p:nvSpPr>
+        <p:spPr>
+          <a:xfrm>
+            <a:off x="640080" y="1481328"/>
+            <a:ext cx="3383280" cy="1691640"/>
+          </a:xfrm>
+          <a:prstGeom prst="roundRect">
+            <a:avLst>
+              <a:gd fmla="val 3243" name="adj"/>
+            </a:avLst>
+          </a:prstGeom>
+          <a:solidFill>
+            <a:srgbClr val="FFFFFF"/>
+          </a:solidFill>
+          <a:ln cap="flat" cmpd="sng" w="9525">
+            <a:solidFill>
+              <a:srgbClr val="D8DEE9"/>
+            </a:solidFill>
+            <a:prstDash val="solid"/>
+            <a:round/>
+            <a:headEnd len="sm" w="sm" type="none"/>
+            <a:tailEnd len="sm" w="sm" type="none"/>
+          </a:ln>
+        </p:spPr>
+        <p:txBody>
+          <a:bodyPr anchorCtr="0" anchor="t" bIns="45700" lIns="91425" spcFirstLastPara="1" rIns="91425" wrap="square" tIns="45700">
+            <a:noAutofit/>
+          </a:bodyPr>
+          <a:lstStyle/>
+          <a:p>
+            <a:pPr indent="0" lvl="0" marL="0" marR="0" rtl="0" algn="l">
+              <a:spcBef>
+                <a:spcPts val="0"/>
+              </a:spcBef>
+              <a:spcAft>
+                <a:spcPts val="0"/>
+              </a:spcAft>
+              <a:buNone/>
+            </a:pPr>
+            <a:r>
+              <a:t/>
+            </a:r>
+            <a:endParaRPr sz="1800">
+              <a:solidFill>
+                <a:schemeClr val="dk1"/>
+              </a:solidFill>
+              <a:latin typeface="Calibri"/>
+              <a:ea typeface="Calibri"/>
+              <a:cs typeface="Calibri"/>
+              <a:sym typeface="Calibri"/>
+            </a:endParaRPr>
+          </a:p>
+        </p:txBody>
+      </p:sp>
+      <p:sp>
+        <p:nvSpPr>
+          <p:cNvPr id="408" name="Google Shape;408;p12"/>
+          <p:cNvSpPr/>
+          <p:nvPr/>
+        </p:nvSpPr>
+        <p:spPr>
+          <a:xfrm>
+            <a:off x="877824" y="1691640"/>
+            <a:ext cx="420624" cy="420624"/>
+          </a:xfrm>
+          <a:prstGeom prst="ellipse">
+            <a:avLst/>
+          </a:prstGeom>
+          <a:solidFill>
+            <a:srgbClr val="2F5FA8"/>
+          </a:solidFill>
+          <a:ln cap="flat" cmpd="sng" w="12700">
+            <a:solidFill>
+              <a:srgbClr val="2F5FA8"/>
+            </a:solidFill>
+            <a:prstDash val="solid"/>
+            <a:round/>
+            <a:headEnd len="sm" w="sm" type="none"/>
+            <a:tailEnd len="sm" w="sm" type="none"/>
+          </a:ln>
+        </p:spPr>
+        <p:txBody>
+          <a:bodyPr anchorCtr="0" anchor="t" bIns="45700" lIns="91425" spcFirstLastPara="1" rIns="91425" wrap="square" tIns="45700">
+            <a:noAutofit/>
+          </a:bodyPr>
+          <a:lstStyle/>
+          <a:p>
+            <a:pPr indent="0" lvl="0" marL="0" marR="0" rtl="0" algn="l">
+              <a:spcBef>
+                <a:spcPts val="0"/>
+              </a:spcBef>
+              <a:spcAft>
+                <a:spcPts val="0"/>
+              </a:spcAft>
+              <a:buNone/>
+            </a:pPr>
+            <a:r>
+              <a:t/>
+            </a:r>
+            <a:endParaRPr sz="1800">
+              <a:solidFill>
+                <a:schemeClr val="dk1"/>
+              </a:solidFill>
+              <a:latin typeface="Calibri"/>
+              <a:ea typeface="Calibri"/>
+              <a:cs typeface="Calibri"/>
+              <a:sym typeface="Calibri"/>
+            </a:endParaRPr>
+          </a:p>
+        </p:txBody>
+      </p:sp>
+      <p:sp>
+        <p:nvSpPr>
+          <p:cNvPr id="409" name="Google Shape;409;p12"/>
+          <p:cNvSpPr txBox="1"/>
+          <p:nvPr/>
+        </p:nvSpPr>
+        <p:spPr>
+          <a:xfrm>
+            <a:off x="877824" y="1691640"/>
+            <a:ext cx="420624" cy="420624"/>
+          </a:xfrm>
+          <a:prstGeom prst="rect">
+            <a:avLst/>
+          </a:prstGeom>
+          <a:noFill/>
+          <a:ln>
+            <a:noFill/>
+          </a:ln>
+        </p:spPr>
+        <p:txBody>
+          <a:bodyPr anchorCtr="0" anchor="ctr" bIns="0" lIns="0" spcFirstLastPara="1" rIns="0" wrap="square" tIns="0">
+            <a:noAutofit/>
+          </a:bodyPr>
+          <a:lstStyle/>
+          <a:p>
+            <a:pPr indent="0" lvl="0" marL="0" marR="0" rtl="0" algn="ctr">
+              <a:spcBef>
+                <a:spcPts val="0"/>
+              </a:spcBef>
+              <a:spcAft>
+                <a:spcPts val="0"/>
+              </a:spcAft>
+              <a:buClr>
+                <a:srgbClr val="FFFFFF"/>
+              </a:buClr>
+              <a:buSzPts val="1200"/>
+              <a:buFont typeface="Calibri"/>
+              <a:buNone/>
+            </a:pPr>
+            <a:r>
+              <a:rPr b="1" lang="en-US" sz="1200">
+                <a:solidFill>
+                  <a:srgbClr val="FFFFFF"/>
+                </a:solidFill>
+                <a:latin typeface="Calibri"/>
+                <a:ea typeface="Calibri"/>
+                <a:cs typeface="Calibri"/>
+                <a:sym typeface="Calibri"/>
+              </a:rPr>
+              <a:t>FO</a:t>
+            </a:r>
+            <a:endParaRPr sz="1200">
+              <a:solidFill>
+                <a:schemeClr val="dk1"/>
+              </a:solidFill>
+              <a:latin typeface="Calibri"/>
+              <a:ea typeface="Calibri"/>
+              <a:cs typeface="Calibri"/>
+              <a:sym typeface="Calibri"/>
+            </a:endParaRPr>
+          </a:p>
+        </p:txBody>
+      </p:sp>
+      <p:sp>
+        <p:nvSpPr>
+          <p:cNvPr id="410" name="Google Shape;410;p12"/>
+          <p:cNvSpPr txBox="1"/>
+          <p:nvPr/>
+        </p:nvSpPr>
+        <p:spPr>
+          <a:xfrm>
+            <a:off x="1408176" y="1700784"/>
+            <a:ext cx="2468880" cy="256032"/>
+          </a:xfrm>
+          <a:prstGeom prst="rect">
+            <a:avLst/>
+          </a:prstGeom>
+          <a:noFill/>
+          <a:ln>
+            <a:noFill/>
+          </a:ln>
+        </p:spPr>
+        <p:txBody>
+          <a:bodyPr anchorCtr="0" anchor="ctr" bIns="0" lIns="0" spcFirstLastPara="1" rIns="0" wrap="square" tIns="0">
+            <a:noAutofit/>
+          </a:bodyPr>
+          <a:lstStyle/>
+          <a:p>
+            <a:pPr indent="0" lvl="0" marL="0" marR="0" rtl="0" algn="l">
+              <a:spcBef>
+                <a:spcPts val="0"/>
+              </a:spcBef>
+              <a:spcAft>
+                <a:spcPts val="0"/>
+              </a:spcAft>
+              <a:buClr>
+                <a:srgbClr val="1E2761"/>
+              </a:buClr>
+              <a:buSzPts val="1350"/>
+              <a:buFont typeface="Cambria"/>
+              <a:buNone/>
+            </a:pPr>
+            <a:r>
+              <a:rPr b="1" lang="en-US" sz="1350">
+                <a:solidFill>
+                  <a:srgbClr val="1E2761"/>
+                </a:solidFill>
+                <a:latin typeface="Cambria"/>
+                <a:ea typeface="Cambria"/>
+                <a:cs typeface="Cambria"/>
+                <a:sym typeface="Cambria"/>
+              </a:rPr>
+              <a:t>Felipe Orellana</a:t>
+            </a:r>
+            <a:endParaRPr sz="1350">
+              <a:solidFill>
+                <a:schemeClr val="dk1"/>
+              </a:solidFill>
+              <a:latin typeface="Calibri"/>
+              <a:ea typeface="Calibri"/>
+              <a:cs typeface="Calibri"/>
+              <a:sym typeface="Calibri"/>
+            </a:endParaRPr>
+          </a:p>
+        </p:txBody>
+      </p:sp>
+      <p:sp>
+        <p:nvSpPr>
+          <p:cNvPr id="411" name="Google Shape;411;p12"/>
+          <p:cNvSpPr txBox="1"/>
+          <p:nvPr/>
+        </p:nvSpPr>
+        <p:spPr>
+          <a:xfrm>
+            <a:off x="1408176" y="1938528"/>
+            <a:ext cx="2468880" cy="237744"/>
+          </a:xfrm>
+          <a:prstGeom prst="rect">
+            <a:avLst/>
+          </a:prstGeom>
+          <a:noFill/>
+          <a:ln>
+            <a:noFill/>
+          </a:ln>
+        </p:spPr>
+        <p:txBody>
+          <a:bodyPr anchorCtr="0" anchor="ctr" bIns="0" lIns="0" spcFirstLastPara="1" rIns="0" wrap="square" tIns="0">
+            <a:noAutofit/>
+          </a:bodyPr>
+          <a:lstStyle/>
+          <a:p>
+            <a:pPr indent="0" lvl="0" marL="0" marR="0" rtl="0" algn="l">
+              <a:spcBef>
+                <a:spcPts val="0"/>
+              </a:spcBef>
+              <a:spcAft>
+                <a:spcPts val="0"/>
+              </a:spcAft>
+              <a:buClr>
+                <a:srgbClr val="2F5FA8"/>
+              </a:buClr>
+              <a:buSzPts val="1100"/>
+              <a:buFont typeface="Calibri"/>
+              <a:buNone/>
+            </a:pPr>
+            <a:r>
+              <a:rPr b="1" lang="en-US" sz="1100">
+                <a:solidFill>
+                  <a:srgbClr val="2F5FA8"/>
+                </a:solidFill>
+                <a:latin typeface="Calibri"/>
+                <a:ea typeface="Calibri"/>
+                <a:cs typeface="Calibri"/>
+                <a:sym typeface="Calibri"/>
+              </a:rPr>
+              <a:t>Backend y agentes</a:t>
+            </a:r>
+            <a:endParaRPr sz="1100">
+              <a:solidFill>
+                <a:schemeClr val="dk1"/>
+              </a:solidFill>
+              <a:latin typeface="Calibri"/>
+              <a:ea typeface="Calibri"/>
+              <a:cs typeface="Calibri"/>
+              <a:sym typeface="Calibri"/>
+            </a:endParaRPr>
+          </a:p>
+        </p:txBody>
+      </p:sp>
+      <p:sp>
+        <p:nvSpPr>
+          <p:cNvPr id="412" name="Google Shape;412;p12"/>
+          <p:cNvSpPr txBox="1"/>
+          <p:nvPr/>
+        </p:nvSpPr>
+        <p:spPr>
+          <a:xfrm>
+            <a:off x="877824" y="2331720"/>
+            <a:ext cx="2926080" cy="777240"/>
+          </a:xfrm>
+          <a:prstGeom prst="rect">
+            <a:avLst/>
+          </a:prstGeom>
+          <a:noFill/>
+          <a:ln>
+            <a:noFill/>
+          </a:ln>
+        </p:spPr>
+        <p:txBody>
+          <a:bodyPr anchorCtr="0" anchor="ctr" bIns="0" lIns="0" spcFirstLastPara="1" rIns="0" wrap="square" tIns="0">
+            <a:noAutofit/>
+          </a:bodyPr>
+          <a:lstStyle/>
+          <a:p>
+            <a:pPr indent="0" lvl="0" marL="0" marR="0" rtl="0" algn="l">
+              <a:spcBef>
+                <a:spcPts val="0"/>
+              </a:spcBef>
+              <a:spcAft>
+                <a:spcPts val="0"/>
+              </a:spcAft>
+              <a:buClr>
+                <a:srgbClr val="5C6675"/>
+              </a:buClr>
+              <a:buSzPts val="1100"/>
+              <a:buFont typeface="Calibri"/>
+              <a:buNone/>
+            </a:pPr>
+            <a:r>
+              <a:rPr lang="en-US" sz="1100">
+                <a:solidFill>
+                  <a:srgbClr val="5C6675"/>
+                </a:solidFill>
+                <a:latin typeface="Calibri"/>
+                <a:ea typeface="Calibri"/>
+                <a:cs typeface="Calibri"/>
+                <a:sym typeface="Calibri"/>
+              </a:rPr>
+              <a:t>Diseño de la solución, búsqueda en registros europeos y prensa, redacción del informe y avance en tiempo real.</a:t>
+            </a:r>
+            <a:endParaRPr sz="1100">
+              <a:solidFill>
+                <a:schemeClr val="dk1"/>
+              </a:solidFill>
+              <a:latin typeface="Calibri"/>
+              <a:ea typeface="Calibri"/>
+              <a:cs typeface="Calibri"/>
+              <a:sym typeface="Calibri"/>
+            </a:endParaRPr>
+          </a:p>
+        </p:txBody>
+      </p:sp>
+      <p:sp>
+        <p:nvSpPr>
+          <p:cNvPr id="413" name="Google Shape;413;p12"/>
+          <p:cNvSpPr/>
+          <p:nvPr/>
+        </p:nvSpPr>
+        <p:spPr>
+          <a:xfrm>
+            <a:off x="4297680" y="1481328"/>
+            <a:ext cx="3383280" cy="1691640"/>
+          </a:xfrm>
+          <a:prstGeom prst="roundRect">
+            <a:avLst>
+              <a:gd fmla="val 3243" name="adj"/>
+            </a:avLst>
+          </a:prstGeom>
+          <a:solidFill>
+            <a:srgbClr val="FFFFFF"/>
+          </a:solidFill>
+          <a:ln cap="flat" cmpd="sng" w="9525">
+            <a:solidFill>
+              <a:srgbClr val="D8DEE9"/>
+            </a:solidFill>
+            <a:prstDash val="solid"/>
+            <a:round/>
+            <a:headEnd len="sm" w="sm" type="none"/>
+            <a:tailEnd len="sm" w="sm" type="none"/>
+          </a:ln>
+        </p:spPr>
+        <p:txBody>
+          <a:bodyPr anchorCtr="0" anchor="t" bIns="45700" lIns="91425" spcFirstLastPara="1" rIns="91425" wrap="square" tIns="45700">
+            <a:noAutofit/>
+          </a:bodyPr>
+          <a:lstStyle/>
+          <a:p>
+            <a:pPr indent="0" lvl="0" marL="0" marR="0" rtl="0" algn="l">
+              <a:spcBef>
+                <a:spcPts val="0"/>
+              </a:spcBef>
+              <a:spcAft>
+                <a:spcPts val="0"/>
+              </a:spcAft>
+              <a:buNone/>
+            </a:pPr>
+            <a:r>
+              <a:t/>
+            </a:r>
+            <a:endParaRPr sz="1800">
+              <a:solidFill>
+                <a:schemeClr val="dk1"/>
+              </a:solidFill>
+              <a:latin typeface="Calibri"/>
+              <a:ea typeface="Calibri"/>
+              <a:cs typeface="Calibri"/>
+              <a:sym typeface="Calibri"/>
+            </a:endParaRPr>
+          </a:p>
+        </p:txBody>
+      </p:sp>
+      <p:sp>
+        <p:nvSpPr>
+          <p:cNvPr id="414" name="Google Shape;414;p12"/>
+          <p:cNvSpPr/>
+          <p:nvPr/>
+        </p:nvSpPr>
+        <p:spPr>
+          <a:xfrm>
+            <a:off x="4535424" y="1691640"/>
+            <a:ext cx="420624" cy="420624"/>
+          </a:xfrm>
+          <a:prstGeom prst="ellipse">
+            <a:avLst/>
+          </a:prstGeom>
+          <a:solidFill>
+            <a:srgbClr val="1D7A6E"/>
+          </a:solidFill>
+          <a:ln cap="flat" cmpd="sng" w="12700">
+            <a:solidFill>
+              <a:srgbClr val="1D7A6E"/>
+            </a:solidFill>
+            <a:prstDash val="solid"/>
+            <a:round/>
+            <a:headEnd len="sm" w="sm" type="none"/>
+            <a:tailEnd len="sm" w="sm" type="none"/>
+          </a:ln>
+        </p:spPr>
+        <p:txBody>
+          <a:bodyPr anchorCtr="0" anchor="t" bIns="45700" lIns="91425" spcFirstLastPara="1" rIns="91425" wrap="square" tIns="45700">
+            <a:noAutofit/>
+          </a:bodyPr>
+          <a:lstStyle/>
+          <a:p>
+            <a:pPr indent="0" lvl="0" marL="0" marR="0" rtl="0" algn="l">
+              <a:spcBef>
+                <a:spcPts val="0"/>
+              </a:spcBef>
+              <a:spcAft>
+                <a:spcPts val="0"/>
+              </a:spcAft>
+              <a:buNone/>
+            </a:pPr>
+            <a:r>
+              <a:t/>
+            </a:r>
+            <a:endParaRPr sz="1800">
+              <a:solidFill>
+                <a:schemeClr val="dk1"/>
+              </a:solidFill>
+              <a:latin typeface="Calibri"/>
+              <a:ea typeface="Calibri"/>
+              <a:cs typeface="Calibri"/>
+              <a:sym typeface="Calibri"/>
+            </a:endParaRPr>
+          </a:p>
+        </p:txBody>
+      </p:sp>
+      <p:sp>
+        <p:nvSpPr>
+          <p:cNvPr id="415" name="Google Shape;415;p12"/>
+          <p:cNvSpPr txBox="1"/>
+          <p:nvPr/>
+        </p:nvSpPr>
+        <p:spPr>
+          <a:xfrm>
+            <a:off x="4535424" y="1691640"/>
+            <a:ext cx="420624" cy="420624"/>
+          </a:xfrm>
+          <a:prstGeom prst="rect">
+            <a:avLst/>
+          </a:prstGeom>
+          <a:noFill/>
+          <a:ln>
+            <a:noFill/>
+          </a:ln>
+        </p:spPr>
+        <p:txBody>
+          <a:bodyPr anchorCtr="0" anchor="ctr" bIns="0" lIns="0" spcFirstLastPara="1" rIns="0" wrap="square" tIns="0">
+            <a:noAutofit/>
+          </a:bodyPr>
+          <a:lstStyle/>
+          <a:p>
+            <a:pPr indent="0" lvl="0" marL="0" marR="0" rtl="0" algn="ctr">
+              <a:spcBef>
+                <a:spcPts val="0"/>
+              </a:spcBef>
+              <a:spcAft>
+                <a:spcPts val="0"/>
+              </a:spcAft>
+              <a:buClr>
+                <a:srgbClr val="FFFFFF"/>
+              </a:buClr>
+              <a:buSzPts val="1200"/>
+              <a:buFont typeface="Calibri"/>
+              <a:buNone/>
+            </a:pPr>
+            <a:r>
+              <a:rPr b="1" lang="en-US" sz="1200">
+                <a:solidFill>
+                  <a:srgbClr val="FFFFFF"/>
+                </a:solidFill>
+                <a:latin typeface="Calibri"/>
+                <a:ea typeface="Calibri"/>
+                <a:cs typeface="Calibri"/>
+                <a:sym typeface="Calibri"/>
+              </a:rPr>
+              <a:t>DG</a:t>
+            </a:r>
+            <a:endParaRPr sz="1200">
+              <a:solidFill>
+                <a:schemeClr val="dk1"/>
+              </a:solidFill>
+              <a:latin typeface="Calibri"/>
+              <a:ea typeface="Calibri"/>
+              <a:cs typeface="Calibri"/>
+              <a:sym typeface="Calibri"/>
+            </a:endParaRPr>
+          </a:p>
+        </p:txBody>
+      </p:sp>
+      <p:sp>
+        <p:nvSpPr>
+          <p:cNvPr id="416" name="Google Shape;416;p12"/>
+          <p:cNvSpPr txBox="1"/>
+          <p:nvPr/>
+        </p:nvSpPr>
+        <p:spPr>
+          <a:xfrm>
+            <a:off x="5065776" y="1700784"/>
+            <a:ext cx="2468880" cy="256032"/>
+          </a:xfrm>
+          <a:prstGeom prst="rect">
+            <a:avLst/>
+          </a:prstGeom>
+          <a:noFill/>
+          <a:ln>
+            <a:noFill/>
+          </a:ln>
+        </p:spPr>
+        <p:txBody>
+          <a:bodyPr anchorCtr="0" anchor="ctr" bIns="0" lIns="0" spcFirstLastPara="1" rIns="0" wrap="square" tIns="0">
+            <a:noAutofit/>
+          </a:bodyPr>
+          <a:lstStyle/>
+          <a:p>
+            <a:pPr indent="0" lvl="0" marL="0" marR="0" rtl="0" algn="l">
+              <a:spcBef>
+                <a:spcPts val="0"/>
+              </a:spcBef>
+              <a:spcAft>
+                <a:spcPts val="0"/>
+              </a:spcAft>
+              <a:buClr>
+                <a:srgbClr val="1E2761"/>
+              </a:buClr>
+              <a:buSzPts val="1350"/>
+              <a:buFont typeface="Cambria"/>
+              <a:buNone/>
+            </a:pPr>
+            <a:r>
+              <a:rPr b="1" lang="en-US" sz="1350">
+                <a:solidFill>
+                  <a:srgbClr val="1E2761"/>
+                </a:solidFill>
+                <a:latin typeface="Cambria"/>
+                <a:ea typeface="Cambria"/>
+                <a:cs typeface="Cambria"/>
+                <a:sym typeface="Cambria"/>
+              </a:rPr>
+              <a:t>Darío García</a:t>
+            </a:r>
+            <a:endParaRPr sz="1350">
+              <a:solidFill>
+                <a:schemeClr val="dk1"/>
+              </a:solidFill>
+              <a:latin typeface="Calibri"/>
+              <a:ea typeface="Calibri"/>
+              <a:cs typeface="Calibri"/>
+              <a:sym typeface="Calibri"/>
+            </a:endParaRPr>
+          </a:p>
+        </p:txBody>
+      </p:sp>
+      <p:sp>
+        <p:nvSpPr>
+          <p:cNvPr id="417" name="Google Shape;417;p12"/>
+          <p:cNvSpPr txBox="1"/>
+          <p:nvPr/>
+        </p:nvSpPr>
+        <p:spPr>
+          <a:xfrm>
+            <a:off x="5065776" y="1938528"/>
+            <a:ext cx="2468880" cy="237744"/>
+          </a:xfrm>
+          <a:prstGeom prst="rect">
+            <a:avLst/>
+          </a:prstGeom>
+          <a:noFill/>
+          <a:ln>
+            <a:noFill/>
+          </a:ln>
+        </p:spPr>
+        <p:txBody>
+          <a:bodyPr anchorCtr="0" anchor="ctr" bIns="0" lIns="0" spcFirstLastPara="1" rIns="0" wrap="square" tIns="0">
+            <a:noAutofit/>
+          </a:bodyPr>
+          <a:lstStyle/>
+          <a:p>
+            <a:pPr indent="0" lvl="0" marL="0" marR="0" rtl="0" algn="l">
+              <a:spcBef>
+                <a:spcPts val="0"/>
+              </a:spcBef>
+              <a:spcAft>
+                <a:spcPts val="0"/>
+              </a:spcAft>
+              <a:buClr>
+                <a:srgbClr val="1D7A6E"/>
+              </a:buClr>
+              <a:buSzPts val="1100"/>
+              <a:buFont typeface="Calibri"/>
+              <a:buNone/>
+            </a:pPr>
+            <a:r>
+              <a:rPr b="1" lang="en-US" sz="1100">
+                <a:solidFill>
+                  <a:srgbClr val="1D7A6E"/>
+                </a:solidFill>
+                <a:latin typeface="Calibri"/>
+                <a:ea typeface="Calibri"/>
+                <a:cs typeface="Calibri"/>
+                <a:sym typeface="Calibri"/>
+              </a:rPr>
+              <a:t>Frontend e integraciones</a:t>
+            </a:r>
+            <a:endParaRPr sz="1100">
+              <a:solidFill>
+                <a:schemeClr val="dk1"/>
+              </a:solidFill>
+              <a:latin typeface="Calibri"/>
+              <a:ea typeface="Calibri"/>
+              <a:cs typeface="Calibri"/>
+              <a:sym typeface="Calibri"/>
+            </a:endParaRPr>
+          </a:p>
+        </p:txBody>
+      </p:sp>
+      <p:sp>
+        <p:nvSpPr>
+          <p:cNvPr id="418" name="Google Shape;418;p12"/>
+          <p:cNvSpPr txBox="1"/>
+          <p:nvPr/>
+        </p:nvSpPr>
+        <p:spPr>
+          <a:xfrm>
+            <a:off x="4535424" y="2331720"/>
+            <a:ext cx="2926080" cy="777240"/>
+          </a:xfrm>
+          <a:prstGeom prst="rect">
+            <a:avLst/>
+          </a:prstGeom>
+          <a:noFill/>
+          <a:ln>
+            <a:noFill/>
+          </a:ln>
+        </p:spPr>
+        <p:txBody>
+          <a:bodyPr anchorCtr="0" anchor="ctr" bIns="0" lIns="0" spcFirstLastPara="1" rIns="0" wrap="square" tIns="0">
+            <a:noAutofit/>
+          </a:bodyPr>
+          <a:lstStyle/>
+          <a:p>
+            <a:pPr indent="0" lvl="0" marL="0" marR="0" rtl="0" algn="l">
+              <a:spcBef>
+                <a:spcPts val="0"/>
+              </a:spcBef>
+              <a:spcAft>
+                <a:spcPts val="0"/>
+              </a:spcAft>
+              <a:buClr>
+                <a:srgbClr val="5C6675"/>
+              </a:buClr>
+              <a:buSzPts val="1100"/>
+              <a:buFont typeface="Calibri"/>
+              <a:buNone/>
+            </a:pPr>
+            <a:r>
+              <a:rPr lang="en-US" sz="1100">
+                <a:solidFill>
+                  <a:srgbClr val="5C6675"/>
+                </a:solidFill>
+                <a:latin typeface="Calibri"/>
+                <a:ea typeface="Calibri"/>
+                <a:cs typeface="Calibri"/>
+                <a:sym typeface="Calibri"/>
+              </a:rPr>
+              <a:t>Dashboard, avance en tiempo real, envío por correo y automatización desde el calendario.</a:t>
+            </a:r>
+            <a:endParaRPr sz="1100">
+              <a:solidFill>
+                <a:schemeClr val="dk1"/>
+              </a:solidFill>
+              <a:latin typeface="Calibri"/>
+              <a:ea typeface="Calibri"/>
+              <a:cs typeface="Calibri"/>
+              <a:sym typeface="Calibri"/>
+            </a:endParaRPr>
+          </a:p>
+        </p:txBody>
+      </p:sp>
+      <p:sp>
+        <p:nvSpPr>
+          <p:cNvPr id="419" name="Google Shape;419;p12"/>
+          <p:cNvSpPr/>
+          <p:nvPr/>
+        </p:nvSpPr>
+        <p:spPr>
+          <a:xfrm>
+            <a:off x="7955280" y="1481328"/>
+            <a:ext cx="3383280" cy="1691640"/>
+          </a:xfrm>
+          <a:prstGeom prst="roundRect">
+            <a:avLst>
+              <a:gd fmla="val 3243" name="adj"/>
+            </a:avLst>
+          </a:prstGeom>
+          <a:solidFill>
+            <a:srgbClr val="FFFFFF"/>
+          </a:solidFill>
+          <a:ln cap="flat" cmpd="sng" w="9525">
+            <a:solidFill>
+              <a:srgbClr val="D8DEE9"/>
+            </a:solidFill>
+            <a:prstDash val="solid"/>
+            <a:round/>
+            <a:headEnd len="sm" w="sm" type="none"/>
+            <a:tailEnd len="sm" w="sm" type="none"/>
+          </a:ln>
+        </p:spPr>
+        <p:txBody>
+          <a:bodyPr anchorCtr="0" anchor="t" bIns="45700" lIns="91425" spcFirstLastPara="1" rIns="91425" wrap="square" tIns="45700">
+            <a:noAutofit/>
+          </a:bodyPr>
+          <a:lstStyle/>
+          <a:p>
+            <a:pPr indent="0" lvl="0" marL="0" marR="0" rtl="0" algn="l">
+              <a:spcBef>
+                <a:spcPts val="0"/>
+              </a:spcBef>
+              <a:spcAft>
+                <a:spcPts val="0"/>
+              </a:spcAft>
+              <a:buNone/>
+            </a:pPr>
+            <a:r>
+              <a:t/>
+            </a:r>
+            <a:endParaRPr sz="1800">
+              <a:solidFill>
+                <a:schemeClr val="dk1"/>
+              </a:solidFill>
+              <a:latin typeface="Calibri"/>
+              <a:ea typeface="Calibri"/>
+              <a:cs typeface="Calibri"/>
+              <a:sym typeface="Calibri"/>
+            </a:endParaRPr>
+          </a:p>
+        </p:txBody>
+      </p:sp>
+      <p:sp>
+        <p:nvSpPr>
+          <p:cNvPr id="420" name="Google Shape;420;p12"/>
+          <p:cNvSpPr/>
+          <p:nvPr/>
+        </p:nvSpPr>
+        <p:spPr>
+          <a:xfrm>
+            <a:off x="8193024" y="1691640"/>
+            <a:ext cx="420624" cy="420624"/>
+          </a:xfrm>
+          <a:prstGeom prst="ellipse">
+            <a:avLst/>
+          </a:prstGeom>
+          <a:solidFill>
+            <a:srgbClr val="B7791F"/>
+          </a:solidFill>
+          <a:ln cap="flat" cmpd="sng" w="12700">
+            <a:solidFill>
+              <a:srgbClr val="B7791F"/>
+            </a:solidFill>
+            <a:prstDash val="solid"/>
+            <a:round/>
+            <a:headEnd len="sm" w="sm" type="none"/>
+            <a:tailEnd len="sm" w="sm" type="none"/>
+          </a:ln>
+        </p:spPr>
+        <p:txBody>
+          <a:bodyPr anchorCtr="0" anchor="t" bIns="45700" lIns="91425" spcFirstLastPara="1" rIns="91425" wrap="square" tIns="45700">
+            <a:noAutofit/>
+          </a:bodyPr>
+          <a:lstStyle/>
+          <a:p>
+            <a:pPr indent="0" lvl="0" marL="0" marR="0" rtl="0" algn="l">
+              <a:spcBef>
+                <a:spcPts val="0"/>
+              </a:spcBef>
+              <a:spcAft>
+                <a:spcPts val="0"/>
+              </a:spcAft>
+              <a:buNone/>
+            </a:pPr>
+            <a:r>
+              <a:t/>
+            </a:r>
+            <a:endParaRPr sz="1800">
+              <a:solidFill>
+                <a:schemeClr val="dk1"/>
+              </a:solidFill>
+              <a:latin typeface="Calibri"/>
+              <a:ea typeface="Calibri"/>
+              <a:cs typeface="Calibri"/>
+              <a:sym typeface="Calibri"/>
+            </a:endParaRPr>
+          </a:p>
+        </p:txBody>
+      </p:sp>
+      <p:sp>
+        <p:nvSpPr>
+          <p:cNvPr id="421" name="Google Shape;421;p12"/>
+          <p:cNvSpPr txBox="1"/>
+          <p:nvPr/>
+        </p:nvSpPr>
+        <p:spPr>
+          <a:xfrm>
+            <a:off x="8193024" y="1691640"/>
+            <a:ext cx="420624" cy="420624"/>
+          </a:xfrm>
+          <a:prstGeom prst="rect">
+            <a:avLst/>
+          </a:prstGeom>
+          <a:noFill/>
+          <a:ln>
+            <a:noFill/>
+          </a:ln>
+        </p:spPr>
+        <p:txBody>
+          <a:bodyPr anchorCtr="0" anchor="ctr" bIns="0" lIns="0" spcFirstLastPara="1" rIns="0" wrap="square" tIns="0">
+            <a:noAutofit/>
+          </a:bodyPr>
+          <a:lstStyle/>
+          <a:p>
+            <a:pPr indent="0" lvl="0" marL="0" marR="0" rtl="0" algn="ctr">
+              <a:spcBef>
+                <a:spcPts val="0"/>
+              </a:spcBef>
+              <a:spcAft>
+                <a:spcPts val="0"/>
+              </a:spcAft>
+              <a:buClr>
+                <a:srgbClr val="FFFFFF"/>
+              </a:buClr>
+              <a:buSzPts val="1200"/>
+              <a:buFont typeface="Calibri"/>
+              <a:buNone/>
+            </a:pPr>
+            <a:r>
+              <a:rPr b="1" lang="en-US" sz="1200">
+                <a:solidFill>
+                  <a:srgbClr val="FFFFFF"/>
+                </a:solidFill>
+                <a:latin typeface="Calibri"/>
+                <a:ea typeface="Calibri"/>
+                <a:cs typeface="Calibri"/>
+                <a:sym typeface="Calibri"/>
+              </a:rPr>
+              <a:t>FD</a:t>
+            </a:r>
+            <a:endParaRPr sz="1200">
+              <a:solidFill>
+                <a:schemeClr val="dk1"/>
+              </a:solidFill>
+              <a:latin typeface="Calibri"/>
+              <a:ea typeface="Calibri"/>
+              <a:cs typeface="Calibri"/>
+              <a:sym typeface="Calibri"/>
+            </a:endParaRPr>
+          </a:p>
+        </p:txBody>
+      </p:sp>
+      <p:sp>
+        <p:nvSpPr>
+          <p:cNvPr id="422" name="Google Shape;422;p12"/>
+          <p:cNvSpPr txBox="1"/>
+          <p:nvPr/>
+        </p:nvSpPr>
+        <p:spPr>
+          <a:xfrm>
+            <a:off x="8723376" y="1700784"/>
+            <a:ext cx="2468880" cy="256032"/>
+          </a:xfrm>
+          <a:prstGeom prst="rect">
+            <a:avLst/>
+          </a:prstGeom>
+          <a:noFill/>
+          <a:ln>
+            <a:noFill/>
+          </a:ln>
+        </p:spPr>
+        <p:txBody>
+          <a:bodyPr anchorCtr="0" anchor="ctr" bIns="0" lIns="0" spcFirstLastPara="1" rIns="0" wrap="square" tIns="0">
+            <a:noAutofit/>
+          </a:bodyPr>
+          <a:lstStyle/>
+          <a:p>
+            <a:pPr indent="0" lvl="0" marL="0" marR="0" rtl="0" algn="l">
+              <a:spcBef>
+                <a:spcPts val="0"/>
+              </a:spcBef>
+              <a:spcAft>
+                <a:spcPts val="0"/>
+              </a:spcAft>
+              <a:buClr>
+                <a:srgbClr val="1E2761"/>
+              </a:buClr>
+              <a:buSzPts val="1350"/>
+              <a:buFont typeface="Cambria"/>
+              <a:buNone/>
+            </a:pPr>
+            <a:r>
+              <a:rPr b="1" lang="en-US" sz="1350">
+                <a:solidFill>
+                  <a:srgbClr val="1E2761"/>
+                </a:solidFill>
+                <a:latin typeface="Cambria"/>
+                <a:ea typeface="Cambria"/>
+                <a:cs typeface="Cambria"/>
+                <a:sym typeface="Cambria"/>
+              </a:rPr>
+              <a:t>Felipe Docmac</a:t>
+            </a:r>
+            <a:endParaRPr sz="1350">
+              <a:solidFill>
+                <a:schemeClr val="dk1"/>
+              </a:solidFill>
+              <a:latin typeface="Calibri"/>
+              <a:ea typeface="Calibri"/>
+              <a:cs typeface="Calibri"/>
+              <a:sym typeface="Calibri"/>
+            </a:endParaRPr>
+          </a:p>
+        </p:txBody>
+      </p:sp>
+      <p:sp>
+        <p:nvSpPr>
+          <p:cNvPr id="423" name="Google Shape;423;p12"/>
+          <p:cNvSpPr txBox="1"/>
+          <p:nvPr/>
+        </p:nvSpPr>
+        <p:spPr>
+          <a:xfrm>
+            <a:off x="8723376" y="1938528"/>
+            <a:ext cx="2468880" cy="237744"/>
+          </a:xfrm>
+          <a:prstGeom prst="rect">
+            <a:avLst/>
+          </a:prstGeom>
+          <a:noFill/>
+          <a:ln>
+            <a:noFill/>
+          </a:ln>
+        </p:spPr>
+        <p:txBody>
+          <a:bodyPr anchorCtr="0" anchor="ctr" bIns="0" lIns="0" spcFirstLastPara="1" rIns="0" wrap="square" tIns="0">
+            <a:noAutofit/>
+          </a:bodyPr>
+          <a:lstStyle/>
+          <a:p>
+            <a:pPr indent="0" lvl="0" marL="0" marR="0" rtl="0" algn="l">
+              <a:spcBef>
+                <a:spcPts val="0"/>
+              </a:spcBef>
+              <a:spcAft>
+                <a:spcPts val="0"/>
+              </a:spcAft>
+              <a:buClr>
+                <a:srgbClr val="B7791F"/>
+              </a:buClr>
+              <a:buSzPts val="1100"/>
+              <a:buFont typeface="Calibri"/>
+              <a:buNone/>
+            </a:pPr>
+            <a:r>
+              <a:rPr b="1" lang="en-US" sz="1100">
+                <a:solidFill>
+                  <a:srgbClr val="B7791F"/>
+                </a:solidFill>
+                <a:latin typeface="Calibri"/>
+                <a:ea typeface="Calibri"/>
+                <a:cs typeface="Calibri"/>
+                <a:sym typeface="Calibri"/>
+              </a:rPr>
+              <a:t>Seguridad y calidad</a:t>
+            </a:r>
+            <a:endParaRPr sz="1100">
+              <a:solidFill>
+                <a:schemeClr val="dk1"/>
+              </a:solidFill>
+              <a:latin typeface="Calibri"/>
+              <a:ea typeface="Calibri"/>
+              <a:cs typeface="Calibri"/>
+              <a:sym typeface="Calibri"/>
+            </a:endParaRPr>
+          </a:p>
+        </p:txBody>
+      </p:sp>
+      <p:sp>
+        <p:nvSpPr>
+          <p:cNvPr id="424" name="Google Shape;424;p12"/>
+          <p:cNvSpPr txBox="1"/>
+          <p:nvPr/>
+        </p:nvSpPr>
+        <p:spPr>
+          <a:xfrm>
+            <a:off x="8193024" y="2331720"/>
+            <a:ext cx="2926080" cy="777240"/>
+          </a:xfrm>
+          <a:prstGeom prst="rect">
+            <a:avLst/>
+          </a:prstGeom>
+          <a:noFill/>
+          <a:ln>
+            <a:noFill/>
+          </a:ln>
+        </p:spPr>
+        <p:txBody>
+          <a:bodyPr anchorCtr="0" anchor="ctr" bIns="0" lIns="0" spcFirstLastPara="1" rIns="0" wrap="square" tIns="0">
+            <a:noAutofit/>
+          </a:bodyPr>
+          <a:lstStyle/>
+          <a:p>
+            <a:pPr indent="0" lvl="0" marL="0" marR="0" rtl="0" algn="l">
+              <a:spcBef>
+                <a:spcPts val="0"/>
+              </a:spcBef>
+              <a:spcAft>
+                <a:spcPts val="0"/>
+              </a:spcAft>
+              <a:buClr>
+                <a:srgbClr val="5C6675"/>
+              </a:buClr>
+              <a:buSzPts val="1100"/>
+              <a:buFont typeface="Calibri"/>
+              <a:buNone/>
+            </a:pPr>
+            <a:r>
+              <a:rPr lang="en-US" sz="1100">
+                <a:solidFill>
+                  <a:srgbClr val="5C6675"/>
+                </a:solidFill>
+                <a:latin typeface="Calibri"/>
+                <a:ea typeface="Calibri"/>
+                <a:cs typeface="Calibri"/>
+                <a:sym typeface="Calibri"/>
+              </a:rPr>
+              <a:t>Consolidación técnica, control de accesos, auditoría y plan de pruebas.</a:t>
+            </a:r>
+            <a:endParaRPr sz="1100">
+              <a:solidFill>
+                <a:schemeClr val="dk1"/>
+              </a:solidFill>
+              <a:latin typeface="Calibri"/>
+              <a:ea typeface="Calibri"/>
+              <a:cs typeface="Calibri"/>
+              <a:sym typeface="Calibri"/>
+            </a:endParaRPr>
+          </a:p>
+        </p:txBody>
+      </p:sp>
+      <p:sp>
+        <p:nvSpPr>
+          <p:cNvPr id="425" name="Google Shape;425;p12"/>
+          <p:cNvSpPr/>
+          <p:nvPr/>
+        </p:nvSpPr>
+        <p:spPr>
+          <a:xfrm>
+            <a:off x="640080" y="3401568"/>
+            <a:ext cx="5303520" cy="2514600"/>
+          </a:xfrm>
+          <a:prstGeom prst="roundRect">
+            <a:avLst>
+              <a:gd fmla="val 2182" name="adj"/>
+            </a:avLst>
+          </a:prstGeom>
+          <a:solidFill>
+            <a:srgbClr val="F2F5FA"/>
+          </a:solidFill>
+          <a:ln cap="flat" cmpd="sng" w="9525">
+            <a:solidFill>
+              <a:srgbClr val="D8DEE9"/>
+            </a:solidFill>
+            <a:prstDash val="solid"/>
+            <a:round/>
+            <a:headEnd len="sm" w="sm" type="none"/>
+            <a:tailEnd len="sm" w="sm" type="none"/>
+          </a:ln>
+        </p:spPr>
+        <p:txBody>
+          <a:bodyPr anchorCtr="0" anchor="t" bIns="45700" lIns="91425" spcFirstLastPara="1" rIns="91425" wrap="square" tIns="45700">
+            <a:noAutofit/>
+          </a:bodyPr>
+          <a:lstStyle/>
+          <a:p>
+            <a:pPr indent="0" lvl="0" marL="0" marR="0" rtl="0" algn="l">
+              <a:spcBef>
+                <a:spcPts val="0"/>
+              </a:spcBef>
+              <a:spcAft>
+                <a:spcPts val="0"/>
+              </a:spcAft>
+              <a:buNone/>
+            </a:pPr>
+            <a:r>
+              <a:t/>
+            </a:r>
+            <a:endParaRPr sz="1800">
+              <a:solidFill>
+                <a:schemeClr val="dk1"/>
+              </a:solidFill>
+              <a:latin typeface="Calibri"/>
+              <a:ea typeface="Calibri"/>
+              <a:cs typeface="Calibri"/>
+              <a:sym typeface="Calibri"/>
+            </a:endParaRPr>
+          </a:p>
+        </p:txBody>
+      </p:sp>
+      <p:sp>
+        <p:nvSpPr>
+          <p:cNvPr id="426" name="Google Shape;426;p12"/>
+          <p:cNvSpPr txBox="1"/>
+          <p:nvPr/>
+        </p:nvSpPr>
+        <p:spPr>
+          <a:xfrm>
+            <a:off x="914400" y="3584448"/>
+            <a:ext cx="4754880" cy="256032"/>
+          </a:xfrm>
+          <a:prstGeom prst="rect">
+            <a:avLst/>
+          </a:prstGeom>
+          <a:noFill/>
+          <a:ln>
+            <a:noFill/>
+          </a:ln>
+        </p:spPr>
+        <p:txBody>
+          <a:bodyPr anchorCtr="0" anchor="ctr" bIns="0" lIns="0" spcFirstLastPara="1" rIns="0" wrap="square" tIns="0">
+            <a:noAutofit/>
+          </a:bodyPr>
+          <a:lstStyle/>
+          <a:p>
+            <a:pPr indent="0" lvl="0" marL="0" marR="0" rtl="0" algn="l">
+              <a:spcBef>
+                <a:spcPts val="0"/>
+              </a:spcBef>
+              <a:spcAft>
+                <a:spcPts val="0"/>
+              </a:spcAft>
+              <a:buClr>
+                <a:srgbClr val="1E2761"/>
+              </a:buClr>
+              <a:buSzPts val="1050"/>
+              <a:buFont typeface="Calibri"/>
+              <a:buNone/>
+            </a:pPr>
+            <a:r>
+              <a:rPr b="1" lang="en-US" sz="1050">
+                <a:solidFill>
+                  <a:srgbClr val="1E2761"/>
+                </a:solidFill>
+                <a:latin typeface="Calibri"/>
+                <a:ea typeface="Calibri"/>
+                <a:cs typeface="Calibri"/>
+                <a:sym typeface="Calibri"/>
+              </a:rPr>
+              <a:t>CINCO EVIDENCIAS DE AVANCE</a:t>
+            </a:r>
+            <a:endParaRPr sz="1050">
+              <a:solidFill>
+                <a:schemeClr val="dk1"/>
+              </a:solidFill>
+              <a:latin typeface="Calibri"/>
+              <a:ea typeface="Calibri"/>
+              <a:cs typeface="Calibri"/>
+              <a:sym typeface="Calibri"/>
+            </a:endParaRPr>
+          </a:p>
+        </p:txBody>
+      </p:sp>
+      <p:sp>
+        <p:nvSpPr>
+          <p:cNvPr id="427" name="Google Shape;427;p12"/>
+          <p:cNvSpPr txBox="1"/>
+          <p:nvPr/>
+        </p:nvSpPr>
+        <p:spPr>
+          <a:xfrm>
+            <a:off x="914400" y="3913632"/>
+            <a:ext cx="4754880" cy="310896"/>
+          </a:xfrm>
+          <a:prstGeom prst="rect">
+            <a:avLst/>
+          </a:prstGeom>
+          <a:noFill/>
+          <a:ln>
+            <a:noFill/>
+          </a:ln>
+        </p:spPr>
+        <p:txBody>
+          <a:bodyPr anchorCtr="0" anchor="ctr" bIns="0" lIns="0" spcFirstLastPara="1" rIns="0" wrap="square" tIns="0">
+            <a:noAutofit/>
+          </a:bodyPr>
+          <a:lstStyle/>
+          <a:p>
+            <a:pPr indent="0" lvl="0" marL="0" marR="0" rtl="0" algn="l">
+              <a:spcBef>
+                <a:spcPts val="0"/>
+              </a:spcBef>
+              <a:spcAft>
+                <a:spcPts val="0"/>
+              </a:spcAft>
+              <a:buClr>
+                <a:srgbClr val="1B2233"/>
+              </a:buClr>
+              <a:buSzPts val="1150"/>
+              <a:buFont typeface="Calibri"/>
+              <a:buNone/>
+            </a:pPr>
+            <a:r>
+              <a:rPr lang="en-US" sz="1150">
+                <a:solidFill>
+                  <a:srgbClr val="1B2233"/>
+                </a:solidFill>
+                <a:latin typeface="Calibri"/>
+                <a:ea typeface="Calibri"/>
+                <a:cs typeface="Calibri"/>
+                <a:sym typeface="Calibri"/>
+              </a:rPr>
+              <a:t>·  Diagnóstico y priorización de brechas</a:t>
+            </a:r>
+            <a:endParaRPr sz="1150">
+              <a:solidFill>
+                <a:schemeClr val="dk1"/>
+              </a:solidFill>
+              <a:latin typeface="Calibri"/>
+              <a:ea typeface="Calibri"/>
+              <a:cs typeface="Calibri"/>
+              <a:sym typeface="Calibri"/>
+            </a:endParaRPr>
+          </a:p>
+        </p:txBody>
+      </p:sp>
+      <p:sp>
+        <p:nvSpPr>
+          <p:cNvPr id="428" name="Google Shape;428;p12"/>
+          <p:cNvSpPr txBox="1"/>
+          <p:nvPr/>
+        </p:nvSpPr>
+        <p:spPr>
+          <a:xfrm>
+            <a:off x="914400" y="4279392"/>
+            <a:ext cx="4754880" cy="310896"/>
+          </a:xfrm>
+          <a:prstGeom prst="rect">
+            <a:avLst/>
+          </a:prstGeom>
+          <a:noFill/>
+          <a:ln>
+            <a:noFill/>
+          </a:ln>
+        </p:spPr>
+        <p:txBody>
+          <a:bodyPr anchorCtr="0" anchor="ctr" bIns="0" lIns="0" spcFirstLastPara="1" rIns="0" wrap="square" tIns="0">
+            <a:noAutofit/>
+          </a:bodyPr>
+          <a:lstStyle/>
+          <a:p>
+            <a:pPr indent="0" lvl="0" marL="0" marR="0" rtl="0" algn="l">
+              <a:spcBef>
+                <a:spcPts val="0"/>
+              </a:spcBef>
+              <a:spcAft>
+                <a:spcPts val="0"/>
+              </a:spcAft>
+              <a:buClr>
+                <a:srgbClr val="1B2233"/>
+              </a:buClr>
+              <a:buSzPts val="1150"/>
+              <a:buFont typeface="Calibri"/>
+              <a:buNone/>
+            </a:pPr>
+            <a:r>
+              <a:rPr lang="en-US" sz="1150">
+                <a:solidFill>
+                  <a:srgbClr val="1B2233"/>
+                </a:solidFill>
+                <a:latin typeface="Calibri"/>
+                <a:ea typeface="Calibri"/>
+                <a:cs typeface="Calibri"/>
+                <a:sym typeface="Calibri"/>
+              </a:rPr>
+              <a:t>·  Informe de deuda técnica: inicio y entrega</a:t>
+            </a:r>
+            <a:endParaRPr sz="1150">
+              <a:solidFill>
+                <a:schemeClr val="dk1"/>
+              </a:solidFill>
+              <a:latin typeface="Calibri"/>
+              <a:ea typeface="Calibri"/>
+              <a:cs typeface="Calibri"/>
+              <a:sym typeface="Calibri"/>
+            </a:endParaRPr>
+          </a:p>
+        </p:txBody>
+      </p:sp>
+      <p:sp>
+        <p:nvSpPr>
+          <p:cNvPr id="429" name="Google Shape;429;p12"/>
+          <p:cNvSpPr txBox="1"/>
+          <p:nvPr/>
+        </p:nvSpPr>
+        <p:spPr>
+          <a:xfrm>
+            <a:off x="914400" y="4645152"/>
+            <a:ext cx="4754880" cy="310896"/>
+          </a:xfrm>
+          <a:prstGeom prst="rect">
+            <a:avLst/>
+          </a:prstGeom>
+          <a:noFill/>
+          <a:ln>
+            <a:noFill/>
+          </a:ln>
+        </p:spPr>
+        <p:txBody>
+          <a:bodyPr anchorCtr="0" anchor="ctr" bIns="0" lIns="0" spcFirstLastPara="1" rIns="0" wrap="square" tIns="0">
+            <a:noAutofit/>
+          </a:bodyPr>
+          <a:lstStyle/>
+          <a:p>
+            <a:pPr indent="0" lvl="0" marL="0" marR="0" rtl="0" algn="l">
+              <a:spcBef>
+                <a:spcPts val="0"/>
+              </a:spcBef>
+              <a:spcAft>
+                <a:spcPts val="0"/>
+              </a:spcAft>
+              <a:buClr>
+                <a:srgbClr val="1B2233"/>
+              </a:buClr>
+              <a:buSzPts val="1150"/>
+              <a:buFont typeface="Calibri"/>
+              <a:buNone/>
+            </a:pPr>
+            <a:r>
+              <a:rPr lang="en-US" sz="1150">
+                <a:solidFill>
+                  <a:srgbClr val="1B2233"/>
+                </a:solidFill>
+                <a:latin typeface="Calibri"/>
+                <a:ea typeface="Calibri"/>
+                <a:cs typeface="Calibri"/>
+                <a:sym typeface="Calibri"/>
+              </a:rPr>
+              <a:t>·  Documento de diseño de la solución</a:t>
+            </a:r>
+            <a:endParaRPr sz="1150">
+              <a:solidFill>
+                <a:schemeClr val="dk1"/>
+              </a:solidFill>
+              <a:latin typeface="Calibri"/>
+              <a:ea typeface="Calibri"/>
+              <a:cs typeface="Calibri"/>
+              <a:sym typeface="Calibri"/>
+            </a:endParaRPr>
+          </a:p>
+        </p:txBody>
+      </p:sp>
+      <p:sp>
+        <p:nvSpPr>
+          <p:cNvPr id="430" name="Google Shape;430;p12"/>
+          <p:cNvSpPr txBox="1"/>
+          <p:nvPr/>
+        </p:nvSpPr>
+        <p:spPr>
+          <a:xfrm>
+            <a:off x="914400" y="5010912"/>
+            <a:ext cx="4754880" cy="310896"/>
+          </a:xfrm>
+          <a:prstGeom prst="rect">
+            <a:avLst/>
+          </a:prstGeom>
+          <a:noFill/>
+          <a:ln>
+            <a:noFill/>
+          </a:ln>
+        </p:spPr>
+        <p:txBody>
+          <a:bodyPr anchorCtr="0" anchor="ctr" bIns="0" lIns="0" spcFirstLastPara="1" rIns="0" wrap="square" tIns="0">
+            <a:noAutofit/>
+          </a:bodyPr>
+          <a:lstStyle/>
+          <a:p>
+            <a:pPr indent="0" lvl="0" marL="0" marR="0" rtl="0" algn="l">
+              <a:spcBef>
+                <a:spcPts val="0"/>
+              </a:spcBef>
+              <a:spcAft>
+                <a:spcPts val="0"/>
+              </a:spcAft>
+              <a:buNone/>
+            </a:pPr>
+            <a:r>
+              <a:rPr lang="en-US" sz="1150">
+                <a:solidFill>
+                  <a:srgbClr val="1B2233"/>
+                </a:solidFill>
+                <a:latin typeface="Calibri"/>
+                <a:ea typeface="Calibri"/>
+                <a:cs typeface="Calibri"/>
+                <a:sym typeface="Calibri"/>
+              </a:rPr>
+              <a:t>·  Repositorio con los agentes operativos</a:t>
+            </a:r>
+            <a:endParaRPr sz="1150">
+              <a:solidFill>
+                <a:schemeClr val="dk1"/>
+              </a:solidFill>
+              <a:latin typeface="Calibri"/>
+              <a:ea typeface="Calibri"/>
+              <a:cs typeface="Calibri"/>
+              <a:sym typeface="Calibri"/>
+            </a:endParaRPr>
+          </a:p>
+        </p:txBody>
+      </p:sp>
+      <p:sp>
+        <p:nvSpPr>
+          <p:cNvPr id="431" name="Google Shape;431;p12"/>
+          <p:cNvSpPr txBox="1"/>
+          <p:nvPr/>
+        </p:nvSpPr>
+        <p:spPr>
+          <a:xfrm>
+            <a:off x="914400" y="5376672"/>
+            <a:ext cx="4754880" cy="310896"/>
+          </a:xfrm>
+          <a:prstGeom prst="rect">
+            <a:avLst/>
+          </a:prstGeom>
+          <a:noFill/>
+          <a:ln>
+            <a:noFill/>
+          </a:ln>
+        </p:spPr>
+        <p:txBody>
+          <a:bodyPr anchorCtr="0" anchor="ctr" bIns="0" lIns="0" spcFirstLastPara="1" rIns="0" wrap="square" tIns="0">
+            <a:noAutofit/>
+          </a:bodyPr>
+          <a:lstStyle/>
+          <a:p>
+            <a:pPr indent="0" lvl="0" marL="0" marR="0" rtl="0" algn="l">
+              <a:spcBef>
+                <a:spcPts val="0"/>
+              </a:spcBef>
+              <a:spcAft>
+                <a:spcPts val="0"/>
+              </a:spcAft>
+              <a:buClr>
+                <a:srgbClr val="1B2233"/>
+              </a:buClr>
+              <a:buSzPts val="1150"/>
+              <a:buFont typeface="Calibri"/>
+              <a:buNone/>
+            </a:pPr>
+            <a:r>
+              <a:rPr lang="en-US" sz="1150">
+                <a:solidFill>
+                  <a:srgbClr val="1B2233"/>
+                </a:solidFill>
+                <a:latin typeface="Calibri"/>
+                <a:ea typeface="Calibri"/>
+                <a:cs typeface="Calibri"/>
+                <a:sym typeface="Calibri"/>
+              </a:rPr>
+              <a:t>·  Dashboard con avance en tiempo real</a:t>
+            </a:r>
+            <a:endParaRPr sz="1150">
+              <a:solidFill>
+                <a:schemeClr val="dk1"/>
+              </a:solidFill>
+              <a:latin typeface="Calibri"/>
+              <a:ea typeface="Calibri"/>
+              <a:cs typeface="Calibri"/>
+              <a:sym typeface="Calibri"/>
+            </a:endParaRPr>
+          </a:p>
+        </p:txBody>
+      </p:sp>
+      <p:sp>
+        <p:nvSpPr>
+          <p:cNvPr id="432" name="Google Shape;432;p12"/>
+          <p:cNvSpPr/>
+          <p:nvPr/>
+        </p:nvSpPr>
+        <p:spPr>
+          <a:xfrm>
+            <a:off x="6245352" y="3401568"/>
+            <a:ext cx="5303520" cy="2514600"/>
+          </a:xfrm>
+          <a:prstGeom prst="roundRect">
+            <a:avLst>
+              <a:gd fmla="val 2182" name="adj"/>
+            </a:avLst>
+          </a:prstGeom>
+          <a:solidFill>
+            <a:srgbClr val="F2F5FA"/>
+          </a:solidFill>
+          <a:ln cap="flat" cmpd="sng" w="9525">
+            <a:solidFill>
+              <a:srgbClr val="D8DEE9"/>
+            </a:solidFill>
+            <a:prstDash val="solid"/>
+            <a:round/>
+            <a:headEnd len="sm" w="sm" type="none"/>
+            <a:tailEnd len="sm" w="sm" type="none"/>
+          </a:ln>
+        </p:spPr>
+        <p:txBody>
+          <a:bodyPr anchorCtr="0" anchor="t" bIns="45700" lIns="91425" spcFirstLastPara="1" rIns="91425" wrap="square" tIns="45700">
+            <a:noAutofit/>
+          </a:bodyPr>
+          <a:lstStyle/>
+          <a:p>
+            <a:pPr indent="0" lvl="0" marL="0" marR="0" rtl="0" algn="l">
+              <a:spcBef>
+                <a:spcPts val="0"/>
+              </a:spcBef>
+              <a:spcAft>
+                <a:spcPts val="0"/>
+              </a:spcAft>
+              <a:buNone/>
+            </a:pPr>
+            <a:r>
+              <a:t/>
+            </a:r>
+            <a:endParaRPr sz="1800">
+              <a:solidFill>
+                <a:schemeClr val="dk1"/>
+              </a:solidFill>
+              <a:latin typeface="Calibri"/>
+              <a:ea typeface="Calibri"/>
+              <a:cs typeface="Calibri"/>
+              <a:sym typeface="Calibri"/>
+            </a:endParaRPr>
+          </a:p>
+        </p:txBody>
+      </p:sp>
+      <p:sp>
+        <p:nvSpPr>
+          <p:cNvPr id="433" name="Google Shape;433;p12"/>
+          <p:cNvSpPr txBox="1"/>
+          <p:nvPr/>
+        </p:nvSpPr>
+        <p:spPr>
+          <a:xfrm>
+            <a:off x="6519672" y="3584448"/>
+            <a:ext cx="4754880" cy="256032"/>
+          </a:xfrm>
+          <a:prstGeom prst="rect">
+            <a:avLst/>
+          </a:prstGeom>
+          <a:noFill/>
+          <a:ln>
+            <a:noFill/>
+          </a:ln>
+        </p:spPr>
+        <p:txBody>
+          <a:bodyPr anchorCtr="0" anchor="ctr" bIns="0" lIns="0" spcFirstLastPara="1" rIns="0" wrap="square" tIns="0">
+            <a:noAutofit/>
+          </a:bodyPr>
+          <a:lstStyle/>
+          <a:p>
+            <a:pPr indent="0" lvl="0" marL="0" marR="0" rtl="0" algn="l">
+              <a:spcBef>
+                <a:spcPts val="0"/>
+              </a:spcBef>
+              <a:spcAft>
+                <a:spcPts val="0"/>
+              </a:spcAft>
+              <a:buClr>
+                <a:srgbClr val="B7791F"/>
+              </a:buClr>
+              <a:buSzPts val="1050"/>
+              <a:buFont typeface="Calibri"/>
+              <a:buNone/>
+            </a:pPr>
+            <a:r>
+              <a:rPr b="1" lang="en-US" sz="1050">
+                <a:solidFill>
+                  <a:srgbClr val="B7791F"/>
+                </a:solidFill>
+                <a:latin typeface="Calibri"/>
+                <a:ea typeface="Calibri"/>
+                <a:cs typeface="Calibri"/>
+                <a:sym typeface="Calibri"/>
+              </a:rPr>
+              <a:t>CUATRO EVIDENCIAS FINALES</a:t>
+            </a:r>
+            <a:endParaRPr sz="1050">
+              <a:solidFill>
+                <a:schemeClr val="dk1"/>
+              </a:solidFill>
+              <a:latin typeface="Calibri"/>
+              <a:ea typeface="Calibri"/>
+              <a:cs typeface="Calibri"/>
+              <a:sym typeface="Calibri"/>
+            </a:endParaRPr>
+          </a:p>
+        </p:txBody>
+      </p:sp>
+      <p:sp>
+        <p:nvSpPr>
+          <p:cNvPr id="434" name="Google Shape;434;p12"/>
+          <p:cNvSpPr txBox="1"/>
+          <p:nvPr/>
+        </p:nvSpPr>
+        <p:spPr>
+          <a:xfrm>
+            <a:off x="6519672" y="3913632"/>
+            <a:ext cx="4754880" cy="310896"/>
+          </a:xfrm>
+          <a:prstGeom prst="rect">
+            <a:avLst/>
+          </a:prstGeom>
+          <a:noFill/>
+          <a:ln>
+            <a:noFill/>
+          </a:ln>
+        </p:spPr>
+        <p:txBody>
+          <a:bodyPr anchorCtr="0" anchor="ctr" bIns="0" lIns="0" spcFirstLastPara="1" rIns="0" wrap="square" tIns="0">
+            <a:noAutofit/>
+          </a:bodyPr>
+          <a:lstStyle/>
+          <a:p>
+            <a:pPr indent="0" lvl="0" marL="0" marR="0" rtl="0" algn="l">
+              <a:spcBef>
+                <a:spcPts val="0"/>
+              </a:spcBef>
+              <a:spcAft>
+                <a:spcPts val="0"/>
+              </a:spcAft>
+              <a:buClr>
+                <a:srgbClr val="1B2233"/>
+              </a:buClr>
+              <a:buSzPts val="1150"/>
+              <a:buFont typeface="Calibri"/>
+              <a:buNone/>
+            </a:pPr>
+            <a:r>
+              <a:rPr lang="en-US" sz="1150">
+                <a:solidFill>
+                  <a:srgbClr val="1B2233"/>
+                </a:solidFill>
+                <a:latin typeface="Calibri"/>
+                <a:ea typeface="Calibri"/>
+                <a:cs typeface="Calibri"/>
+                <a:sym typeface="Calibri"/>
+              </a:rPr>
+              <a:t>·  Sistema en funcionamiento con envío por correo</a:t>
+            </a:r>
+            <a:endParaRPr sz="1150">
+              <a:solidFill>
+                <a:schemeClr val="dk1"/>
+              </a:solidFill>
+              <a:latin typeface="Calibri"/>
+              <a:ea typeface="Calibri"/>
+              <a:cs typeface="Calibri"/>
+              <a:sym typeface="Calibri"/>
+            </a:endParaRPr>
+          </a:p>
+        </p:txBody>
+      </p:sp>
+      <p:sp>
+        <p:nvSpPr>
+          <p:cNvPr id="435" name="Google Shape;435;p12"/>
+          <p:cNvSpPr txBox="1"/>
+          <p:nvPr/>
+        </p:nvSpPr>
+        <p:spPr>
+          <a:xfrm>
+            <a:off x="6519672" y="4279392"/>
+            <a:ext cx="4754880" cy="310896"/>
+          </a:xfrm>
+          <a:prstGeom prst="rect">
+            <a:avLst/>
+          </a:prstGeom>
+          <a:noFill/>
+          <a:ln>
+            <a:noFill/>
+          </a:ln>
+        </p:spPr>
+        <p:txBody>
+          <a:bodyPr anchorCtr="0" anchor="ctr" bIns="0" lIns="0" spcFirstLastPara="1" rIns="0" wrap="square" tIns="0">
+            <a:noAutofit/>
+          </a:bodyPr>
+          <a:lstStyle/>
+          <a:p>
+            <a:pPr indent="0" lvl="0" marL="0" marR="0" rtl="0" algn="l">
+              <a:spcBef>
+                <a:spcPts val="0"/>
+              </a:spcBef>
+              <a:spcAft>
+                <a:spcPts val="0"/>
+              </a:spcAft>
+              <a:buClr>
+                <a:srgbClr val="1B2233"/>
+              </a:buClr>
+              <a:buSzPts val="1150"/>
+              <a:buFont typeface="Calibri"/>
+              <a:buNone/>
+            </a:pPr>
+            <a:r>
+              <a:rPr lang="en-US" sz="1150">
+                <a:solidFill>
+                  <a:srgbClr val="1B2233"/>
+                </a:solidFill>
+                <a:latin typeface="Calibri"/>
+                <a:ea typeface="Calibri"/>
+                <a:cs typeface="Calibri"/>
+                <a:sym typeface="Calibri"/>
+              </a:rPr>
+              <a:t>·  Informe de pruebas, seguridad y resultados</a:t>
+            </a:r>
+            <a:endParaRPr sz="1150">
+              <a:solidFill>
+                <a:schemeClr val="dk1"/>
+              </a:solidFill>
+              <a:latin typeface="Calibri"/>
+              <a:ea typeface="Calibri"/>
+              <a:cs typeface="Calibri"/>
+              <a:sym typeface="Calibri"/>
+            </a:endParaRPr>
+          </a:p>
+        </p:txBody>
+      </p:sp>
+      <p:sp>
+        <p:nvSpPr>
+          <p:cNvPr id="436" name="Google Shape;436;p12"/>
+          <p:cNvSpPr txBox="1"/>
+          <p:nvPr/>
+        </p:nvSpPr>
+        <p:spPr>
+          <a:xfrm>
+            <a:off x="6519672" y="4645152"/>
+            <a:ext cx="4754880" cy="310896"/>
+          </a:xfrm>
+          <a:prstGeom prst="rect">
+            <a:avLst/>
+          </a:prstGeom>
+          <a:noFill/>
+          <a:ln>
+            <a:noFill/>
+          </a:ln>
+        </p:spPr>
+        <p:txBody>
+          <a:bodyPr anchorCtr="0" anchor="ctr" bIns="0" lIns="0" spcFirstLastPara="1" rIns="0" wrap="square" tIns="0">
+            <a:noAutofit/>
+          </a:bodyPr>
+          <a:lstStyle/>
+          <a:p>
+            <a:pPr indent="0" lvl="0" marL="0" marR="0" rtl="0" algn="l">
+              <a:spcBef>
+                <a:spcPts val="0"/>
+              </a:spcBef>
+              <a:spcAft>
+                <a:spcPts val="0"/>
+              </a:spcAft>
+              <a:buClr>
+                <a:srgbClr val="1B2233"/>
+              </a:buClr>
+              <a:buSzPts val="1150"/>
+              <a:buFont typeface="Calibri"/>
+              <a:buNone/>
+            </a:pPr>
+            <a:r>
+              <a:rPr lang="en-US" sz="1150">
+                <a:solidFill>
+                  <a:srgbClr val="1B2233"/>
+                </a:solidFill>
+                <a:latin typeface="Calibri"/>
+                <a:ea typeface="Calibri"/>
+                <a:cs typeface="Calibri"/>
+                <a:sym typeface="Calibri"/>
+              </a:rPr>
+              <a:t>·  Documentación técnica y manual de usuario</a:t>
+            </a:r>
+            <a:endParaRPr sz="1150">
+              <a:solidFill>
+                <a:schemeClr val="dk1"/>
+              </a:solidFill>
+              <a:latin typeface="Calibri"/>
+              <a:ea typeface="Calibri"/>
+              <a:cs typeface="Calibri"/>
+              <a:sym typeface="Calibri"/>
+            </a:endParaRPr>
+          </a:p>
+        </p:txBody>
+      </p:sp>
+      <p:sp>
+        <p:nvSpPr>
+          <p:cNvPr id="437" name="Google Shape;437;p12"/>
+          <p:cNvSpPr txBox="1"/>
+          <p:nvPr/>
+        </p:nvSpPr>
+        <p:spPr>
+          <a:xfrm>
+            <a:off x="6519672" y="5010912"/>
+            <a:ext cx="4754880" cy="310896"/>
+          </a:xfrm>
+          <a:prstGeom prst="rect">
+            <a:avLst/>
+          </a:prstGeom>
+          <a:noFill/>
+          <a:ln>
+            <a:noFill/>
+          </a:ln>
+        </p:spPr>
+        <p:txBody>
+          <a:bodyPr anchorCtr="0" anchor="ctr" bIns="0" lIns="0" spcFirstLastPara="1" rIns="0" wrap="square" tIns="0">
+            <a:noAutofit/>
+          </a:bodyPr>
+          <a:lstStyle/>
+          <a:p>
+            <a:pPr indent="0" lvl="0" marL="0" marR="0" rtl="0" algn="l">
+              <a:spcBef>
+                <a:spcPts val="0"/>
+              </a:spcBef>
+              <a:spcAft>
+                <a:spcPts val="0"/>
+              </a:spcAft>
+              <a:buClr>
+                <a:srgbClr val="1B2233"/>
+              </a:buClr>
+              <a:buSzPts val="1150"/>
+              <a:buFont typeface="Calibri"/>
+              <a:buNone/>
+            </a:pPr>
+            <a:r>
+              <a:rPr lang="en-US" sz="1150">
+                <a:solidFill>
+                  <a:srgbClr val="1B2233"/>
+                </a:solidFill>
+                <a:latin typeface="Calibri"/>
+                <a:ea typeface="Calibri"/>
+                <a:cs typeface="Calibri"/>
+                <a:sym typeface="Calibri"/>
+              </a:rPr>
+              <a:t>·  Informe final y presentación de defensa</a:t>
+            </a:r>
+            <a:endParaRPr sz="1150">
+              <a:solidFill>
+                <a:schemeClr val="dk1"/>
+              </a:solidFill>
+              <a:latin typeface="Calibri"/>
+              <a:ea typeface="Calibri"/>
+              <a:cs typeface="Calibri"/>
+              <a:sym typeface="Calibri"/>
+            </a:endParaRPr>
+          </a:p>
+        </p:txBody>
+      </p:sp>
+      <p:sp>
+        <p:nvSpPr>
+          <p:cNvPr id="438" name="Google Shape;438;p12"/>
+          <p:cNvSpPr txBox="1"/>
+          <p:nvPr/>
+        </p:nvSpPr>
+        <p:spPr>
+          <a:xfrm>
+            <a:off x="640080" y="6291072"/>
+            <a:ext cx="10881360" cy="274320"/>
+          </a:xfrm>
+          <a:prstGeom prst="rect">
+            <a:avLst/>
+          </a:prstGeom>
+          <a:noFill/>
+          <a:ln>
+            <a:noFill/>
+          </a:ln>
+        </p:spPr>
+        <p:txBody>
+          <a:bodyPr anchorCtr="0" anchor="ctr" bIns="0" lIns="0" spcFirstLastPara="1" rIns="0" wrap="square" tIns="0">
+            <a:noAutofit/>
+          </a:bodyPr>
+          <a:lstStyle/>
+          <a:p>
+            <a:pPr indent="0" lvl="0" marL="0" marR="0" rtl="0" algn="l">
+              <a:spcBef>
+                <a:spcPts val="0"/>
+              </a:spcBef>
+              <a:spcAft>
+                <a:spcPts val="0"/>
+              </a:spcAft>
+              <a:buClr>
+                <a:srgbClr val="5C6675"/>
+              </a:buClr>
+              <a:buSzPts val="1000"/>
+              <a:buFont typeface="Calibri"/>
+              <a:buNone/>
+            </a:pPr>
+            <a:r>
+              <a:rPr i="1" lang="en-US" sz="1000">
+                <a:solidFill>
+                  <a:srgbClr val="5C6675"/>
+                </a:solidFill>
+                <a:latin typeface="Calibri"/>
+                <a:ea typeface="Calibri"/>
+                <a:cs typeface="Calibri"/>
+                <a:sym typeface="Calibri"/>
+              </a:rPr>
+              <a:t>Cada evidencia responde a uno o más objetivos específicos y tiene una actividad del plan que la produce.</a:t>
+            </a:r>
+            <a:endParaRPr sz="1000">
+              <a:solidFill>
+                <a:schemeClr val="dk1"/>
+              </a:solidFill>
+              <a:latin typeface="Calibri"/>
+              <a:ea typeface="Calibri"/>
+              <a:cs typeface="Calibri"/>
+              <a:sym typeface="Calibri"/>
+            </a:endParaRPr>
+          </a:p>
+        </p:txBody>
+      </p:sp>
+    </p:spTree>
+  </p:cSld>
+  <p:clrMapOvr>
+    <a:masterClrMapping/>
+  </p:clrMapOvr>
+</p:sld>
+</file>
+
+<file path=ppt/slides/slide14.xml><?xml version="1.0" encoding="utf-8"?>
+<p:sld xmlns:a="http://schemas.openxmlformats.org/drawingml/2006/main" xmlns:r="http://schemas.openxmlformats.org/officeDocument/2006/relationships" xmlns:mc="http://schemas.openxmlformats.org/markup-compatibility/2006" xmlns:mv="urn:schemas-microsoft-com:mac:vml" xmlns:p="http://schemas.openxmlformats.org/presentationml/2006/main" xmlns:c="http://schemas.openxmlformats.org/drawingml/2006/chart" xmlns:dgm="http://schemas.openxmlformats.org/drawingml/2006/diagram" xmlns:o="urn:schemas-microsoft-com:office:office" xmlns:v="urn:schemas-microsoft-com:vml" xmlns:pvml="urn:schemas-microsoft-com:office:powerpoint" xmlns:com="http://schemas.openxmlformats.org/drawingml/2006/compatibility" xmlns:p14="http://schemas.microsoft.com/office/powerpoint/2010/main" xmlns:p15="http://schemas.microsoft.com/office/powerpoint/2012/main" xmlns:ahyp="http://schemas.microsoft.com/office/drawing/2018/hyperlinkcolor">
+  <p:cSld>
+    <p:bg>
+      <p:bgPr>
+        <a:solidFill>
+          <a:srgbClr val="1E2761"/>
+        </a:solidFill>
+      </p:bgPr>
+    </p:bg>
+    <p:spTree>
+      <p:nvGrpSpPr>
+        <p:cNvPr id="443" name="Shape 443"/>
+        <p:cNvGrpSpPr/>
+        <p:nvPr/>
+      </p:nvGrpSpPr>
+      <p:grpSpPr>
+        <a:xfrm>
+          <a:off x="0" y="0"/>
+          <a:ext cx="0" cy="0"/>
+          <a:chOff x="0" y="0"/>
+          <a:chExt cx="0" cy="0"/>
+        </a:xfrm>
+      </p:grpSpPr>
+      <p:sp>
+        <p:nvSpPr>
+          <p:cNvPr id="444" name="Google Shape;444;p13"/>
           <p:cNvSpPr/>
           <p:nvPr/>
         </p:nvSpPr>
@@ -10961,7 +11273,7 @@
       </p:sp>
       <p:sp>
         <p:nvSpPr>
-          <p:cNvPr id="439" name="Google Shape;439;p13"/>
+          <p:cNvPr id="445" name="Google Shape;445;p13"/>
           <p:cNvSpPr/>
           <p:nvPr/>
         </p:nvSpPr>
@@ -11018,7 +11330,7 @@
       </p:sp>
       <p:sp>
         <p:nvSpPr>
-          <p:cNvPr id="440" name="Google Shape;440;p13"/>
+          <p:cNvPr id="446" name="Google Shape;446;p13"/>
           <p:cNvSpPr txBox="1"/>
           <p:nvPr/>
         </p:nvSpPr>
@@ -11094,7 +11406,7 @@
       </p:sp>
       <p:sp>
         <p:nvSpPr>
-          <p:cNvPr id="441" name="Google Shape;441;p13"/>
+          <p:cNvPr id="447" name="Google Shape;447;p13"/>
           <p:cNvSpPr/>
           <p:nvPr/>
         </p:nvSpPr>
@@ -11151,7 +11463,7 @@
       </p:sp>
       <p:sp>
         <p:nvSpPr>
-          <p:cNvPr id="442" name="Google Shape;442;p13"/>
+          <p:cNvPr id="448" name="Google Shape;448;p13"/>
           <p:cNvSpPr txBox="1"/>
           <p:nvPr/>
         </p:nvSpPr>
@@ -11214,7 +11526,7 @@
       </p:sp>
       <p:sp>
         <p:nvSpPr>
-          <p:cNvPr id="443" name="Google Shape;443;p13"/>
+          <p:cNvPr id="449" name="Google Shape;449;p13"/>
           <p:cNvSpPr txBox="1"/>
           <p:nvPr/>
         </p:nvSpPr>
@@ -27388,6 +27700,285 @@
 </file>
 
 <file path=ppt/theme/theme1.xml><?xml version="1.0" encoding="utf-8"?>
+<a:theme xmlns:a="http://schemas.openxmlformats.org/drawingml/2006/main" xmlns:r="http://schemas.openxmlformats.org/officeDocument/2006/relationships" name="Tema de Office">
+  <a:themeElements>
+    <a:clrScheme name="Office">
+      <a:dk1>
+        <a:srgbClr val="000000"/>
+      </a:dk1>
+      <a:lt1>
+        <a:srgbClr val="FFFFFF"/>
+      </a:lt1>
+      <a:dk2>
+        <a:srgbClr val="0E2841"/>
+      </a:dk2>
+      <a:lt2>
+        <a:srgbClr val="E8E8E8"/>
+      </a:lt2>
+      <a:accent1>
+        <a:srgbClr val="156082"/>
+      </a:accent1>
+      <a:accent2>
+        <a:srgbClr val="E97132"/>
+      </a:accent2>
+      <a:accent3>
+        <a:srgbClr val="196B24"/>
+      </a:accent3>
+      <a:accent4>
+        <a:srgbClr val="0F9ED5"/>
+      </a:accent4>
+      <a:accent5>
+        <a:srgbClr val="A02B93"/>
+      </a:accent5>
+      <a:accent6>
+        <a:srgbClr val="4EA72E"/>
+      </a:accent6>
+      <a:hlink>
+        <a:srgbClr val="467886"/>
+      </a:hlink>
+      <a:folHlink>
+        <a:srgbClr val="96607D"/>
+      </a:folHlink>
+    </a:clrScheme>
+    <a:fontScheme name="Office">
+      <a:majorFont>
+        <a:latin typeface="Arial"/>
+        <a:ea typeface=""/>
+        <a:cs typeface=""/>
+        <a:font script="Jpan" typeface="ＭＳ Ｐゴシック"/>
+        <a:font script="Hang" typeface="맑은 고딕"/>
+        <a:font script="Hans" typeface="宋体"/>
+        <a:font script="Hant" typeface="新細明體"/>
+        <a:font script="Arab" typeface="Times New Roman"/>
+        <a:font script="Hebr" typeface="Times New Roman"/>
+        <a:font script="Thai" typeface="Angsana New"/>
+        <a:font script="Ethi" typeface="Nyala"/>
+        <a:font script="Beng" typeface="Vrinda"/>
+        <a:font script="Gujr" typeface="Shruti"/>
+        <a:font script="Khmr" typeface="MoolBoran"/>
+        <a:font script="Knda" typeface="Tunga"/>
+        <a:font script="Guru" typeface="Raavi"/>
+        <a:font script="Cans" typeface="Euphemia"/>
+        <a:font script="Cher" typeface="Plantagenet Cherokee"/>
+        <a:font script="Yiii" typeface="Microsoft Yi Baiti"/>
+        <a:font script="Tibt" typeface="Microsoft Himalaya"/>
+        <a:font script="Thaa" typeface="MV Boli"/>
+        <a:font script="Deva" typeface="Mangal"/>
+        <a:font script="Telu" typeface="Gautami"/>
+        <a:font script="Taml" typeface="Latha"/>
+        <a:font script="Syrc" typeface="Estrangelo Edessa"/>
+        <a:font script="Orya" typeface="Kalinga"/>
+        <a:font script="Mlym" typeface="Kartika"/>
+        <a:font script="Laoo" typeface="DokChampa"/>
+        <a:font script="Sinh" typeface="Iskoola Pota"/>
+        <a:font script="Mong" typeface="Mongolian Baiti"/>
+        <a:font script="Viet" typeface="Times New Roman"/>
+        <a:font script="Uigh" typeface="Microsoft Uighur"/>
+        <a:font script="Geor" typeface="Sylfaen"/>
+      </a:majorFont>
+      <a:minorFont>
+        <a:latin typeface="Arial"/>
+        <a:ea typeface=""/>
+        <a:cs typeface=""/>
+        <a:font script="Jpan" typeface="ＭＳ Ｐゴシック"/>
+        <a:font script="Hang" typeface="맑은 고딕"/>
+        <a:font script="Hans" typeface="宋体"/>
+        <a:font script="Hant" typeface="新細明體"/>
+        <a:font script="Arab" typeface="Arial"/>
+        <a:font script="Hebr" typeface="Arial"/>
+        <a:font script="Thai" typeface="Cordia New"/>
+        <a:font script="Ethi" typeface="Nyala"/>
+        <a:font script="Beng" typeface="Vrinda"/>
+        <a:font script="Gujr" typeface="Shruti"/>
+        <a:font script="Khmr" typeface="DaunPenh"/>
+        <a:font script="Knda" typeface="Tunga"/>
+        <a:font script="Guru" typeface="Raavi"/>
+        <a:font script="Cans" typeface="Euphemia"/>
+        <a:font script="Cher" typeface="Plantagenet Cherokee"/>
+        <a:font script="Yiii" typeface="Microsoft Yi Baiti"/>
+        <a:font script="Tibt" typeface="Microsoft Himalaya"/>
+        <a:font script="Thaa" typeface="MV Boli"/>
+        <a:font script="Deva" typeface="Mangal"/>
+        <a:font script="Telu" typeface="Gautami"/>
+        <a:font script="Taml" typeface="Latha"/>
+        <a:font script="Syrc" typeface="Estrangelo Edessa"/>
+        <a:font script="Orya" typeface="Kalinga"/>
+        <a:font script="Mlym" typeface="Kartika"/>
+        <a:font script="Laoo" typeface="DokChampa"/>
+        <a:font script="Sinh" typeface="Iskoola Pota"/>
+        <a:font script="Mong" typeface="Mongolian Baiti"/>
+        <a:font script="Viet" typeface="Arial"/>
+        <a:font script="Uigh" typeface="Microsoft Uighur"/>
+        <a:font script="Geor" typeface="Sylfaen"/>
+      </a:minorFont>
+    </a:fontScheme>
+    <a:fmtScheme name="Office">
+      <a:fillStyleLst>
+        <a:solidFill>
+          <a:schemeClr val="phClr"/>
+        </a:solidFill>
+        <a:gradFill rotWithShape="1">
+          <a:gsLst>
+            <a:gs pos="0">
+              <a:schemeClr val="phClr">
+                <a:tint val="50000"/>
+                <a:satMod val="300000"/>
+              </a:schemeClr>
+            </a:gs>
+            <a:gs pos="35000">
+              <a:schemeClr val="phClr">
+                <a:tint val="37000"/>
+                <a:satMod val="300000"/>
+              </a:schemeClr>
+            </a:gs>
+            <a:gs pos="100000">
+              <a:schemeClr val="phClr">
+                <a:tint val="15000"/>
+                <a:satMod val="350000"/>
+              </a:schemeClr>
+            </a:gs>
+          </a:gsLst>
+          <a:lin ang="16200000" scaled="1"/>
+        </a:gradFill>
+        <a:gradFill rotWithShape="1">
+          <a:gsLst>
+            <a:gs pos="0">
+              <a:schemeClr val="phClr">
+                <a:tint val="100000"/>
+                <a:shade val="100000"/>
+                <a:satMod val="130000"/>
+              </a:schemeClr>
+            </a:gs>
+            <a:gs pos="100000">
+              <a:schemeClr val="phClr">
+                <a:tint val="50000"/>
+                <a:shade val="100000"/>
+                <a:satMod val="350000"/>
+              </a:schemeClr>
+            </a:gs>
+          </a:gsLst>
+          <a:lin ang="16200000" scaled="0"/>
+        </a:gradFill>
+      </a:fillStyleLst>
+      <a:lnStyleLst>
+        <a:ln w="9525" cap="flat" cmpd="sng" algn="ctr">
+          <a:solidFill>
+            <a:schemeClr val="phClr">
+              <a:shade val="95000"/>
+              <a:satMod val="105000"/>
+            </a:schemeClr>
+          </a:solidFill>
+          <a:prstDash val="solid"/>
+        </a:ln>
+        <a:ln w="25400" cap="flat" cmpd="sng" algn="ctr">
+          <a:solidFill>
+            <a:schemeClr val="phClr"/>
+          </a:solidFill>
+          <a:prstDash val="solid"/>
+        </a:ln>
+        <a:ln w="38100" cap="flat" cmpd="sng" algn="ctr">
+          <a:solidFill>
+            <a:schemeClr val="phClr"/>
+          </a:solidFill>
+          <a:prstDash val="solid"/>
+        </a:ln>
+      </a:lnStyleLst>
+      <a:effectStyleLst>
+        <a:effectStyle>
+          <a:effectLst>
+            <a:outerShdw blurRad="40000" dist="20000" dir="5400000" rotWithShape="0">
+              <a:srgbClr val="000000">
+                <a:alpha val="38000"/>
+              </a:srgbClr>
+            </a:outerShdw>
+          </a:effectLst>
+        </a:effectStyle>
+        <a:effectStyle>
+          <a:effectLst>
+            <a:outerShdw blurRad="40000" dist="23000" dir="5400000" rotWithShape="0">
+              <a:srgbClr val="000000">
+                <a:alpha val="35000"/>
+              </a:srgbClr>
+            </a:outerShdw>
+          </a:effectLst>
+        </a:effectStyle>
+        <a:effectStyle>
+          <a:effectLst>
+            <a:outerShdw blurRad="40000" dist="23000" dir="5400000" rotWithShape="0">
+              <a:srgbClr val="000000">
+                <a:alpha val="35000"/>
+              </a:srgbClr>
+            </a:outerShdw>
+          </a:effectLst>
+          <a:scene3d>
+            <a:camera prst="orthographicFront">
+              <a:rot lat="0" lon="0" rev="0"/>
+            </a:camera>
+            <a:lightRig rig="threePt" dir="t">
+              <a:rot lat="0" lon="0" rev="1200000"/>
+            </a:lightRig>
+          </a:scene3d>
+          <a:sp3d>
+            <a:bevelT w="63500" h="25400"/>
+          </a:sp3d>
+        </a:effectStyle>
+      </a:effectStyleLst>
+      <a:bgFillStyleLst>
+        <a:solidFill>
+          <a:schemeClr val="phClr"/>
+        </a:solidFill>
+        <a:gradFill rotWithShape="1">
+          <a:gsLst>
+            <a:gs pos="0">
+              <a:schemeClr val="phClr">
+                <a:tint val="40000"/>
+                <a:satMod val="350000"/>
+              </a:schemeClr>
+            </a:gs>
+            <a:gs pos="40000">
+              <a:schemeClr val="phClr">
+                <a:tint val="45000"/>
+                <a:shade val="99000"/>
+                <a:satMod val="350000"/>
+              </a:schemeClr>
+            </a:gs>
+            <a:gs pos="100000">
+              <a:schemeClr val="phClr">
+                <a:shade val="20000"/>
+                <a:satMod val="255000"/>
+              </a:schemeClr>
+            </a:gs>
+          </a:gsLst>
+          <a:path path="circle">
+            <a:fillToRect l="50000" t="-80000" r="50000" b="180000"/>
+          </a:path>
+        </a:gradFill>
+        <a:gradFill rotWithShape="1">
+          <a:gsLst>
+            <a:gs pos="0">
+              <a:schemeClr val="phClr">
+                <a:tint val="80000"/>
+                <a:satMod val="300000"/>
+              </a:schemeClr>
+            </a:gs>
+            <a:gs pos="100000">
+              <a:schemeClr val="phClr">
+                <a:shade val="30000"/>
+                <a:satMod val="200000"/>
+              </a:schemeClr>
+            </a:gs>
+          </a:gsLst>
+          <a:path path="circle">
+            <a:fillToRect l="50000" t="50000" r="50000" b="50000"/>
+          </a:path>
+        </a:gradFill>
+      </a:bgFillStyleLst>
+    </a:fmtScheme>
+  </a:themeElements>
+</a:theme>
+</file>
+
+<file path=ppt/theme/theme2.xml><?xml version="1.0" encoding="utf-8"?>
 <a:theme xmlns:a="http://schemas.openxmlformats.org/drawingml/2006/main" xmlns:r="http://schemas.openxmlformats.org/officeDocument/2006/relationships" name="Office Theme">
   <a:themeElements>
     <a:clrScheme name="Office">
@@ -27664,283 +28255,4 @@
     </a:fmtScheme>
   </a:themeElements>
 </a:theme>
-</file>
-
-<file path=ppt/theme/theme2.xml><?xml version="1.0" encoding="utf-8"?>
-<a:theme xmlns:a="http://schemas.openxmlformats.org/drawingml/2006/main" xmlns:r="http://schemas.openxmlformats.org/officeDocument/2006/relationships" name="Tema de Office">
-  <a:themeElements>
-    <a:clrScheme name="Office">
-      <a:dk1>
-        <a:srgbClr val="000000"/>
-      </a:dk1>
-      <a:lt1>
-        <a:srgbClr val="FFFFFF"/>
-      </a:lt1>
-      <a:dk2>
-        <a:srgbClr val="0E2841"/>
-      </a:dk2>
-      <a:lt2>
-        <a:srgbClr val="E8E8E8"/>
-      </a:lt2>
-      <a:accent1>
-        <a:srgbClr val="156082"/>
-      </a:accent1>
-      <a:accent2>
-        <a:srgbClr val="E97132"/>
-      </a:accent2>
-      <a:accent3>
-        <a:srgbClr val="196B24"/>
-      </a:accent3>
-      <a:accent4>
-        <a:srgbClr val="0F9ED5"/>
-      </a:accent4>
-      <a:accent5>
-        <a:srgbClr val="A02B93"/>
-      </a:accent5>
-      <a:accent6>
-        <a:srgbClr val="4EA72E"/>
-      </a:accent6>
-      <a:hlink>
-        <a:srgbClr val="467886"/>
-      </a:hlink>
-      <a:folHlink>
-        <a:srgbClr val="96607D"/>
-      </a:folHlink>
-    </a:clrScheme>
-    <a:fontScheme name="Office">
-      <a:majorFont>
-        <a:latin typeface="Arial"/>
-        <a:ea typeface=""/>
-        <a:cs typeface=""/>
-        <a:font script="Jpan" typeface="ＭＳ Ｐゴシック"/>
-        <a:font script="Hang" typeface="맑은 고딕"/>
-        <a:font script="Hans" typeface="宋体"/>
-        <a:font script="Hant" typeface="新細明體"/>
-        <a:font script="Arab" typeface="Times New Roman"/>
-        <a:font script="Hebr" typeface="Times New Roman"/>
-        <a:font script="Thai" typeface="Angsana New"/>
-        <a:font script="Ethi" typeface="Nyala"/>
-        <a:font script="Beng" typeface="Vrinda"/>
-        <a:font script="Gujr" typeface="Shruti"/>
-        <a:font script="Khmr" typeface="MoolBoran"/>
-        <a:font script="Knda" typeface="Tunga"/>
-        <a:font script="Guru" typeface="Raavi"/>
-        <a:font script="Cans" typeface="Euphemia"/>
-        <a:font script="Cher" typeface="Plantagenet Cherokee"/>
-        <a:font script="Yiii" typeface="Microsoft Yi Baiti"/>
-        <a:font script="Tibt" typeface="Microsoft Himalaya"/>
-        <a:font script="Thaa" typeface="MV Boli"/>
-        <a:font script="Deva" typeface="Mangal"/>
-        <a:font script="Telu" typeface="Gautami"/>
-        <a:font script="Taml" typeface="Latha"/>
-        <a:font script="Syrc" typeface="Estrangelo Edessa"/>
-        <a:font script="Orya" typeface="Kalinga"/>
-        <a:font script="Mlym" typeface="Kartika"/>
-        <a:font script="Laoo" typeface="DokChampa"/>
-        <a:font script="Sinh" typeface="Iskoola Pota"/>
-        <a:font script="Mong" typeface="Mongolian Baiti"/>
-        <a:font script="Viet" typeface="Times New Roman"/>
-        <a:font script="Uigh" typeface="Microsoft Uighur"/>
-        <a:font script="Geor" typeface="Sylfaen"/>
-      </a:majorFont>
-      <a:minorFont>
-        <a:latin typeface="Arial"/>
-        <a:ea typeface=""/>
-        <a:cs typeface=""/>
-        <a:font script="Jpan" typeface="ＭＳ Ｐゴシック"/>
-        <a:font script="Hang" typeface="맑은 고딕"/>
-        <a:font script="Hans" typeface="宋体"/>
-        <a:font script="Hant" typeface="新細明體"/>
-        <a:font script="Arab" typeface="Arial"/>
-        <a:font script="Hebr" typeface="Arial"/>
-        <a:font script="Thai" typeface="Cordia New"/>
-        <a:font script="Ethi" typeface="Nyala"/>
-        <a:font script="Beng" typeface="Vrinda"/>
-        <a:font script="Gujr" typeface="Shruti"/>
-        <a:font script="Khmr" typeface="DaunPenh"/>
-        <a:font script="Knda" typeface="Tunga"/>
-        <a:font script="Guru" typeface="Raavi"/>
-        <a:font script="Cans" typeface="Euphemia"/>
-        <a:font script="Cher" typeface="Plantagenet Cherokee"/>
-        <a:font script="Yiii" typeface="Microsoft Yi Baiti"/>
-        <a:font script="Tibt" typeface="Microsoft Himalaya"/>
-        <a:font script="Thaa" typeface="MV Boli"/>
-        <a:font script="Deva" typeface="Mangal"/>
-        <a:font script="Telu" typeface="Gautami"/>
-        <a:font script="Taml" typeface="Latha"/>
-        <a:font script="Syrc" typeface="Estrangelo Edessa"/>
-        <a:font script="Orya" typeface="Kalinga"/>
-        <a:font script="Mlym" typeface="Kartika"/>
-        <a:font script="Laoo" typeface="DokChampa"/>
-        <a:font script="Sinh" typeface="Iskoola Pota"/>
-        <a:font script="Mong" typeface="Mongolian Baiti"/>
-        <a:font script="Viet" typeface="Arial"/>
-        <a:font script="Uigh" typeface="Microsoft Uighur"/>
-        <a:font script="Geor" typeface="Sylfaen"/>
-      </a:minorFont>
-    </a:fontScheme>
-    <a:fmtScheme name="Office">
-      <a:fillStyleLst>
-        <a:solidFill>
-          <a:schemeClr val="phClr"/>
-        </a:solidFill>
-        <a:gradFill rotWithShape="1">
-          <a:gsLst>
-            <a:gs pos="0">
-              <a:schemeClr val="phClr">
-                <a:tint val="50000"/>
-                <a:satMod val="300000"/>
-              </a:schemeClr>
-            </a:gs>
-            <a:gs pos="35000">
-              <a:schemeClr val="phClr">
-                <a:tint val="37000"/>
-                <a:satMod val="300000"/>
-              </a:schemeClr>
-            </a:gs>
-            <a:gs pos="100000">
-              <a:schemeClr val="phClr">
-                <a:tint val="15000"/>
-                <a:satMod val="350000"/>
-              </a:schemeClr>
-            </a:gs>
-          </a:gsLst>
-          <a:lin ang="16200000" scaled="1"/>
-        </a:gradFill>
-        <a:gradFill rotWithShape="1">
-          <a:gsLst>
-            <a:gs pos="0">
-              <a:schemeClr val="phClr">
-                <a:tint val="100000"/>
-                <a:shade val="100000"/>
-                <a:satMod val="130000"/>
-              </a:schemeClr>
-            </a:gs>
-            <a:gs pos="100000">
-              <a:schemeClr val="phClr">
-                <a:tint val="50000"/>
-                <a:shade val="100000"/>
-                <a:satMod val="350000"/>
-              </a:schemeClr>
-            </a:gs>
-          </a:gsLst>
-          <a:lin ang="16200000" scaled="0"/>
-        </a:gradFill>
-      </a:fillStyleLst>
-      <a:lnStyleLst>
-        <a:ln w="9525" cap="flat" cmpd="sng" algn="ctr">
-          <a:solidFill>
-            <a:schemeClr val="phClr">
-              <a:shade val="95000"/>
-              <a:satMod val="105000"/>
-            </a:schemeClr>
-          </a:solidFill>
-          <a:prstDash val="solid"/>
-        </a:ln>
-        <a:ln w="25400" cap="flat" cmpd="sng" algn="ctr">
-          <a:solidFill>
-            <a:schemeClr val="phClr"/>
-          </a:solidFill>
-          <a:prstDash val="solid"/>
-        </a:ln>
-        <a:ln w="38100" cap="flat" cmpd="sng" algn="ctr">
-          <a:solidFill>
-            <a:schemeClr val="phClr"/>
-          </a:solidFill>
-          <a:prstDash val="solid"/>
-        </a:ln>
-      </a:lnStyleLst>
-      <a:effectStyleLst>
-        <a:effectStyle>
-          <a:effectLst>
-            <a:outerShdw blurRad="40000" dist="20000" dir="5400000" rotWithShape="0">
-              <a:srgbClr val="000000">
-                <a:alpha val="38000"/>
-              </a:srgbClr>
-            </a:outerShdw>
-          </a:effectLst>
-        </a:effectStyle>
-        <a:effectStyle>
-          <a:effectLst>
-            <a:outerShdw blurRad="40000" dist="23000" dir="5400000" rotWithShape="0">
-              <a:srgbClr val="000000">
-                <a:alpha val="35000"/>
-              </a:srgbClr>
-            </a:outerShdw>
-          </a:effectLst>
-        </a:effectStyle>
-        <a:effectStyle>
-          <a:effectLst>
-            <a:outerShdw blurRad="40000" dist="23000" dir="5400000" rotWithShape="0">
-              <a:srgbClr val="000000">
-                <a:alpha val="35000"/>
-              </a:srgbClr>
-            </a:outerShdw>
-          </a:effectLst>
-          <a:scene3d>
-            <a:camera prst="orthographicFront">
-              <a:rot lat="0" lon="0" rev="0"/>
-            </a:camera>
-            <a:lightRig rig="threePt" dir="t">
-              <a:rot lat="0" lon="0" rev="1200000"/>
-            </a:lightRig>
-          </a:scene3d>
-          <a:sp3d>
-            <a:bevelT w="63500" h="25400"/>
-          </a:sp3d>
-        </a:effectStyle>
-      </a:effectStyleLst>
-      <a:bgFillStyleLst>
-        <a:solidFill>
-          <a:schemeClr val="phClr"/>
-        </a:solidFill>
-        <a:gradFill rotWithShape="1">
-          <a:gsLst>
-            <a:gs pos="0">
-              <a:schemeClr val="phClr">
-                <a:tint val="40000"/>
-                <a:satMod val="350000"/>
-              </a:schemeClr>
-            </a:gs>
-            <a:gs pos="40000">
-              <a:schemeClr val="phClr">
-                <a:tint val="45000"/>
-                <a:shade val="99000"/>
-                <a:satMod val="350000"/>
-              </a:schemeClr>
-            </a:gs>
-            <a:gs pos="100000">
-              <a:schemeClr val="phClr">
-                <a:shade val="20000"/>
-                <a:satMod val="255000"/>
-              </a:schemeClr>
-            </a:gs>
-          </a:gsLst>
-          <a:path path="circle">
-            <a:fillToRect l="50000" t="-80000" r="50000" b="180000"/>
-          </a:path>
-        </a:gradFill>
-        <a:gradFill rotWithShape="1">
-          <a:gsLst>
-            <a:gs pos="0">
-              <a:schemeClr val="phClr">
-                <a:tint val="80000"/>
-                <a:satMod val="300000"/>
-              </a:schemeClr>
-            </a:gs>
-            <a:gs pos="100000">
-              <a:schemeClr val="phClr">
-                <a:shade val="30000"/>
-                <a:satMod val="200000"/>
-              </a:schemeClr>
-            </a:gs>
-          </a:gsLst>
-          <a:path path="circle">
-            <a:fillToRect l="50000" t="50000" r="50000" b="50000"/>
-          </a:path>
-        </a:gradFill>
-      </a:bgFillStyleLst>
-    </a:fmtScheme>
-  </a:themeElements>
-</a:theme>
 </file>